--- a/Trade-Surveillance-50-Rules.pptx
+++ b/Trade-Surveillance-50-Rules.pptx
@@ -224,10 +224,10 @@
                     <c:v>Trade capture</c:v>
                   </c:pt>
                   <c:pt idx="2">
-                    <c:v>Trade capture · reference data</c:v>
+                    <c:v>Derived / surveillance warehouse</c:v>
                   </c:pt>
                   <c:pt idx="3">
-                    <c:v>Derived / surveillance warehouse</c:v>
+                    <c:v>Trade capture · reference data</c:v>
                   </c:pt>
                   <c:pt idx="4">
                     <c:v>Trade capture / venue</c:v>
@@ -239,10 +239,10 @@
                     <c:v>Market data / tick store</c:v>
                   </c:pt>
                   <c:pt idx="7">
-                    <c:v>Reference data</c:v>
+                    <c:v>Revenue attribution · product control</c:v>
                   </c:pt>
                   <c:pt idx="8">
-                    <c:v>Front-office mandate register</c:v>
+                    <c:v>Reference data</c:v>
                   </c:pt>
                 </c:lvl>
               </c:multiLvlStrCache>
@@ -255,31 +255,31 @@
                 <c:formatCode>General</c:formatCode>
                 <c:ptCount val="9"/>
                 <c:pt idx="0">
-                  <c:v>50</c:v>
+                  <c:v>58</c:v>
                 </c:pt>
                 <c:pt idx="1">
-                  <c:v>48</c:v>
+                  <c:v>56</c:v>
                 </c:pt>
                 <c:pt idx="2">
-                  <c:v>24</c:v>
+                  <c:v>28</c:v>
                 </c:pt>
                 <c:pt idx="3">
                   <c:v>24</c:v>
                 </c:pt>
                 <c:pt idx="4">
-                  <c:v>16</c:v>
+                  <c:v>18</c:v>
                 </c:pt>
                 <c:pt idx="5">
-                  <c:v>14</c:v>
+                  <c:v>15</c:v>
                 </c:pt>
                 <c:pt idx="6">
                   <c:v>13</c:v>
                 </c:pt>
                 <c:pt idx="7">
-                  <c:v>7</c:v>
+                  <c:v>8</c:v>
                 </c:pt>
                 <c:pt idx="8">
-                  <c:v>7</c:v>
+                  <c:v>8</c:v>
                 </c:pt>
               </c:numCache>
             </c:numRef>
@@ -360,7 +360,7 @@
         <c:axId val="2094734552"/>
         <c:scaling>
           <c:orientation val="minMax"/>
-          <c:max val="50"/>
+          <c:max val="60"/>
         </c:scaling>
         <c:delete val="0"/>
         <c:axPos val="b"/>
@@ -1706,7 +1706,7 @@
           <a:p>
             <a:r>
               <a:rPr lang="en-US" dirty="0"/>
-              <a:t>Close on the principle, not the count. Fifty is an implementation detail; the principle is that the reference for every test is the individual, and that the engine's job ends at the question.</a:t>
+              <a:t>Close on the principle, not the count. Fifty-eight is an implementation detail; the principle is that the reference for every test is the individual, and that the engine's job ends at the question.</a:t>
             </a:r>
             <a:endParaRPr lang="en-US" dirty="0"/>
           </a:p>
@@ -4855,6 +4855,334 @@
       </p:sp>
       <p:sp>
         <p:nvSpPr>
+          <p:cNvPr id="64" name="Shape 64"/>
+          <p:cNvSpPr/>
+          <p:nvPr/>
+        </p:nvSpPr>
+        <p:spPr>
+          <a:xfrm>
+            <a:off x="8302752" y="5824728"/>
+            <a:ext cx="658368" cy="256032"/>
+          </a:xfrm>
+          <a:prstGeom prst="rect">
+            <a:avLst/>
+          </a:prstGeom>
+          <a:noFill/>
+          <a:ln/>
+        </p:spPr>
+        <p:txBody>
+          <a:bodyPr wrap="square" lIns="0" tIns="0" rIns="0" bIns="0" rtlCol="0" anchor="ctr"/>
+          <a:lstStyle/>
+          <a:p>
+            <a:pPr algn="ctr" indent="0" marL="0">
+              <a:buNone/>
+            </a:pPr>
+            <a:r>
+              <a:rPr lang="en-US" sz="1000" dirty="0">
+                <a:solidFill>
+                  <a:srgbClr val="E09F3E">
+                    <a:alpha val="38000"/>
+                  </a:srgbClr>
+                </a:solidFill>
+                <a:latin typeface="Courier New" pitchFamily="34" charset="0"/>
+                <a:ea typeface="Courier New" pitchFamily="34" charset="-122"/>
+                <a:cs typeface="Courier New" pitchFamily="34" charset="-120"/>
+              </a:rPr>
+              <a:t>TS-51</a:t>
+            </a:r>
+            <a:endParaRPr lang="en-US" sz="1000" dirty="0"/>
+          </a:p>
+        </p:txBody>
+      </p:sp>
+      <p:sp>
+        <p:nvSpPr>
+          <p:cNvPr id="65" name="Shape 65"/>
+          <p:cNvSpPr/>
+          <p:nvPr/>
+        </p:nvSpPr>
+        <p:spPr>
+          <a:xfrm>
+            <a:off x="9015984" y="5824728"/>
+            <a:ext cx="658368" cy="256032"/>
+          </a:xfrm>
+          <a:prstGeom prst="rect">
+            <a:avLst/>
+          </a:prstGeom>
+          <a:noFill/>
+          <a:ln/>
+        </p:spPr>
+        <p:txBody>
+          <a:bodyPr wrap="square" lIns="0" tIns="0" rIns="0" bIns="0" rtlCol="0" anchor="ctr"/>
+          <a:lstStyle/>
+          <a:p>
+            <a:pPr algn="ctr" indent="0" marL="0">
+              <a:buNone/>
+            </a:pPr>
+            <a:r>
+              <a:rPr lang="en-US" sz="1000" dirty="0">
+                <a:solidFill>
+                  <a:srgbClr val="335C81">
+                    <a:alpha val="38000"/>
+                  </a:srgbClr>
+                </a:solidFill>
+                <a:latin typeface="Courier New" pitchFamily="34" charset="0"/>
+                <a:ea typeface="Courier New" pitchFamily="34" charset="-122"/>
+                <a:cs typeface="Courier New" pitchFamily="34" charset="-120"/>
+              </a:rPr>
+              <a:t>TS-52</a:t>
+            </a:r>
+            <a:endParaRPr lang="en-US" sz="1000" dirty="0"/>
+          </a:p>
+        </p:txBody>
+      </p:sp>
+      <p:sp>
+        <p:nvSpPr>
+          <p:cNvPr id="66" name="Shape 66"/>
+          <p:cNvSpPr/>
+          <p:nvPr/>
+        </p:nvSpPr>
+        <p:spPr>
+          <a:xfrm>
+            <a:off x="457200" y="6135624"/>
+            <a:ext cx="658368" cy="256032"/>
+          </a:xfrm>
+          <a:prstGeom prst="rect">
+            <a:avLst/>
+          </a:prstGeom>
+          <a:noFill/>
+          <a:ln/>
+        </p:spPr>
+        <p:txBody>
+          <a:bodyPr wrap="square" lIns="0" tIns="0" rIns="0" bIns="0" rtlCol="0" anchor="ctr"/>
+          <a:lstStyle/>
+          <a:p>
+            <a:pPr algn="ctr" indent="0" marL="0">
+              <a:buNone/>
+            </a:pPr>
+            <a:r>
+              <a:rPr lang="en-US" sz="1000" dirty="0">
+                <a:solidFill>
+                  <a:srgbClr val="335C81">
+                    <a:alpha val="38000"/>
+                  </a:srgbClr>
+                </a:solidFill>
+                <a:latin typeface="Courier New" pitchFamily="34" charset="0"/>
+                <a:ea typeface="Courier New" pitchFamily="34" charset="-122"/>
+                <a:cs typeface="Courier New" pitchFamily="34" charset="-120"/>
+              </a:rPr>
+              <a:t>TS-53</a:t>
+            </a:r>
+            <a:endParaRPr lang="en-US" sz="1000" dirty="0"/>
+          </a:p>
+        </p:txBody>
+      </p:sp>
+      <p:sp>
+        <p:nvSpPr>
+          <p:cNvPr id="67" name="Shape 67"/>
+          <p:cNvSpPr/>
+          <p:nvPr/>
+        </p:nvSpPr>
+        <p:spPr>
+          <a:xfrm>
+            <a:off x="1170432" y="6135624"/>
+            <a:ext cx="658368" cy="256032"/>
+          </a:xfrm>
+          <a:prstGeom prst="rect">
+            <a:avLst/>
+          </a:prstGeom>
+          <a:noFill/>
+          <a:ln/>
+        </p:spPr>
+        <p:txBody>
+          <a:bodyPr wrap="square" lIns="0" tIns="0" rIns="0" bIns="0" rtlCol="0" anchor="ctr"/>
+          <a:lstStyle/>
+          <a:p>
+            <a:pPr algn="ctr" indent="0" marL="0">
+              <a:buNone/>
+            </a:pPr>
+            <a:r>
+              <a:rPr lang="en-US" sz="1000" dirty="0">
+                <a:solidFill>
+                  <a:srgbClr val="E09F3E">
+                    <a:alpha val="38000"/>
+                  </a:srgbClr>
+                </a:solidFill>
+                <a:latin typeface="Courier New" pitchFamily="34" charset="0"/>
+                <a:ea typeface="Courier New" pitchFamily="34" charset="-122"/>
+                <a:cs typeface="Courier New" pitchFamily="34" charset="-120"/>
+              </a:rPr>
+              <a:t>TS-54</a:t>
+            </a:r>
+            <a:endParaRPr lang="en-US" sz="1000" dirty="0"/>
+          </a:p>
+        </p:txBody>
+      </p:sp>
+      <p:sp>
+        <p:nvSpPr>
+          <p:cNvPr id="68" name="Shape 68"/>
+          <p:cNvSpPr/>
+          <p:nvPr/>
+        </p:nvSpPr>
+        <p:spPr>
+          <a:xfrm>
+            <a:off x="1883664" y="6135624"/>
+            <a:ext cx="658368" cy="256032"/>
+          </a:xfrm>
+          <a:prstGeom prst="rect">
+            <a:avLst/>
+          </a:prstGeom>
+          <a:noFill/>
+          <a:ln/>
+        </p:spPr>
+        <p:txBody>
+          <a:bodyPr wrap="square" lIns="0" tIns="0" rIns="0" bIns="0" rtlCol="0" anchor="ctr"/>
+          <a:lstStyle/>
+          <a:p>
+            <a:pPr algn="ctr" indent="0" marL="0">
+              <a:buNone/>
+            </a:pPr>
+            <a:r>
+              <a:rPr lang="en-US" sz="1000" dirty="0">
+                <a:solidFill>
+                  <a:srgbClr val="E09F3E">
+                    <a:alpha val="38000"/>
+                  </a:srgbClr>
+                </a:solidFill>
+                <a:latin typeface="Courier New" pitchFamily="34" charset="0"/>
+                <a:ea typeface="Courier New" pitchFamily="34" charset="-122"/>
+                <a:cs typeface="Courier New" pitchFamily="34" charset="-120"/>
+              </a:rPr>
+              <a:t>TS-55</a:t>
+            </a:r>
+            <a:endParaRPr lang="en-US" sz="1000" dirty="0"/>
+          </a:p>
+        </p:txBody>
+      </p:sp>
+      <p:sp>
+        <p:nvSpPr>
+          <p:cNvPr id="69" name="Shape 69"/>
+          <p:cNvSpPr/>
+          <p:nvPr/>
+        </p:nvSpPr>
+        <p:spPr>
+          <a:xfrm>
+            <a:off x="2596896" y="6135624"/>
+            <a:ext cx="658368" cy="256032"/>
+          </a:xfrm>
+          <a:prstGeom prst="rect">
+            <a:avLst/>
+          </a:prstGeom>
+          <a:noFill/>
+          <a:ln/>
+        </p:spPr>
+        <p:txBody>
+          <a:bodyPr wrap="square" lIns="0" tIns="0" rIns="0" bIns="0" rtlCol="0" anchor="ctr"/>
+          <a:lstStyle/>
+          <a:p>
+            <a:pPr algn="ctr" indent="0" marL="0">
+              <a:buNone/>
+            </a:pPr>
+            <a:r>
+              <a:rPr lang="en-US" sz="1000" dirty="0">
+                <a:solidFill>
+                  <a:srgbClr val="335C81">
+                    <a:alpha val="38000"/>
+                  </a:srgbClr>
+                </a:solidFill>
+                <a:latin typeface="Courier New" pitchFamily="34" charset="0"/>
+                <a:ea typeface="Courier New" pitchFamily="34" charset="-122"/>
+                <a:cs typeface="Courier New" pitchFamily="34" charset="-120"/>
+              </a:rPr>
+              <a:t>TS-56</a:t>
+            </a:r>
+            <a:endParaRPr lang="en-US" sz="1000" dirty="0"/>
+          </a:p>
+        </p:txBody>
+      </p:sp>
+      <p:sp>
+        <p:nvSpPr>
+          <p:cNvPr id="70" name="Shape 70"/>
+          <p:cNvSpPr/>
+          <p:nvPr/>
+        </p:nvSpPr>
+        <p:spPr>
+          <a:xfrm>
+            <a:off x="3310128" y="6135624"/>
+            <a:ext cx="658368" cy="256032"/>
+          </a:xfrm>
+          <a:prstGeom prst="rect">
+            <a:avLst/>
+          </a:prstGeom>
+          <a:noFill/>
+          <a:ln/>
+        </p:spPr>
+        <p:txBody>
+          <a:bodyPr wrap="square" lIns="0" tIns="0" rIns="0" bIns="0" rtlCol="0" anchor="ctr"/>
+          <a:lstStyle/>
+          <a:p>
+            <a:pPr algn="ctr" indent="0" marL="0">
+              <a:buNone/>
+            </a:pPr>
+            <a:r>
+              <a:rPr lang="en-US" sz="1000" dirty="0">
+                <a:solidFill>
+                  <a:srgbClr val="E09F3E">
+                    <a:alpha val="38000"/>
+                  </a:srgbClr>
+                </a:solidFill>
+                <a:latin typeface="Courier New" pitchFamily="34" charset="0"/>
+                <a:ea typeface="Courier New" pitchFamily="34" charset="-122"/>
+                <a:cs typeface="Courier New" pitchFamily="34" charset="-120"/>
+              </a:rPr>
+              <a:t>TS-57</a:t>
+            </a:r>
+            <a:endParaRPr lang="en-US" sz="1000" dirty="0"/>
+          </a:p>
+        </p:txBody>
+      </p:sp>
+      <p:sp>
+        <p:nvSpPr>
+          <p:cNvPr id="71" name="Shape 71"/>
+          <p:cNvSpPr/>
+          <p:nvPr/>
+        </p:nvSpPr>
+        <p:spPr>
+          <a:xfrm>
+            <a:off x="4023360" y="6135624"/>
+            <a:ext cx="658368" cy="256032"/>
+          </a:xfrm>
+          <a:prstGeom prst="rect">
+            <a:avLst/>
+          </a:prstGeom>
+          <a:noFill/>
+          <a:ln/>
+        </p:spPr>
+        <p:txBody>
+          <a:bodyPr wrap="square" lIns="0" tIns="0" rIns="0" bIns="0" rtlCol="0" anchor="ctr"/>
+          <a:lstStyle/>
+          <a:p>
+            <a:pPr algn="ctr" indent="0" marL="0">
+              <a:buNone/>
+            </a:pPr>
+            <a:r>
+              <a:rPr lang="en-US" sz="1000" dirty="0">
+                <a:solidFill>
+                  <a:srgbClr val="C1121F">
+                    <a:alpha val="38000"/>
+                  </a:srgbClr>
+                </a:solidFill>
+                <a:latin typeface="Courier New" pitchFamily="34" charset="0"/>
+                <a:ea typeface="Courier New" pitchFamily="34" charset="-122"/>
+                <a:cs typeface="Courier New" pitchFamily="34" charset="-120"/>
+              </a:rPr>
+              <a:t>TS-58</a:t>
+            </a:r>
+            <a:endParaRPr lang="en-US" sz="1000" dirty="0"/>
+          </a:p>
+        </p:txBody>
+      </p:sp>
+      <p:sp>
+        <p:nvSpPr>
           <p:cNvPr id="53" name="Text 51"/>
           <p:cNvSpPr/>
           <p:nvPr/>
@@ -4925,7 +5253,7 @@
                 <a:ea typeface="Cambria" pitchFamily="34" charset="-122"/>
                 <a:cs typeface="Cambria" pitchFamily="34" charset="-120"/>
               </a:rPr>
-              <a:t>The Fifty Detection Typologies</a:t>
+              <a:t>The Fifty-Eight Detection Typologies</a:t>
             </a:r>
             <a:endParaRPr lang="en-US" sz="5200" dirty="0"/>
           </a:p>
@@ -5003,7 +5331,7 @@
                 <a:ea typeface="Cambria" pitchFamily="34" charset="-122"/>
                 <a:cs typeface="Cambria" pitchFamily="34" charset="-120"/>
               </a:rPr>
-              <a:t>50</a:t>
+              <a:t>58</a:t>
             </a:r>
             <a:endParaRPr lang="en-US" sz="4000" dirty="0"/>
           </a:p>
@@ -5081,7 +5409,7 @@
                 <a:ea typeface="Cambria" pitchFamily="34" charset="-122"/>
                 <a:cs typeface="Cambria" pitchFamily="34" charset="-120"/>
               </a:rPr>
-              <a:t>60</a:t>
+              <a:t>62</a:t>
             </a:r>
             <a:endParaRPr lang="en-US" sz="4000" dirty="0"/>
           </a:p>
@@ -5159,7 +5487,7 @@
                 <a:ea typeface="Cambria" pitchFamily="34" charset="-122"/>
                 <a:cs typeface="Cambria" pitchFamily="34" charset="-120"/>
               </a:rPr>
-              <a:t>31</a:t>
+              <a:t>32</a:t>
             </a:r>
             <a:endParaRPr lang="en-US" sz="4000" dirty="0"/>
           </a:p>
@@ -5347,7 +5675,7 @@
                 <a:ea typeface="Calibri" pitchFamily="34" charset="-122"/>
                 <a:cs typeface="Calibri" pitchFamily="34" charset="-120"/>
               </a:rPr>
-              <a:t>TYPOLOGIES  ·  3 RULES</a:t>
+              <a:t>TYPOLOGIES  ·  8 RULES</a:t>
             </a:r>
             <a:endParaRPr lang="en-US" sz="1100" dirty="0"/>
           </a:p>
@@ -5425,7 +5753,7 @@
                 <a:ea typeface="Calibri" pitchFamily="34" charset="-122"/>
                 <a:cs typeface="Calibri" pitchFamily="34" charset="-120"/>
               </a:rPr>
-              <a:t>Three tests on whose interest came first when the two diverged.</a:t>
+              <a:t>Eight tests on whose interest came first when the two diverged.</a:t>
             </a:r>
             <a:endParaRPr lang="en-US" sz="1350" dirty="0"/>
           </a:p>
@@ -5433,14 +5761,14 @@
       </p:sp>
       <p:sp>
         <p:nvSpPr>
-          <p:cNvPr id="5" name="Shape 3"/>
+          <p:cNvPr id="23" name="Shape 23"/>
           <p:cNvSpPr/>
           <p:nvPr/>
         </p:nvSpPr>
         <p:spPr>
           <a:xfrm>
             <a:off x="566928" y="1737360"/>
-            <a:ext cx="10881360" cy="530352"/>
+            <a:ext cx="10881360" cy="521208"/>
           </a:xfrm>
           <a:prstGeom prst="rect">
             <a:avLst/>
@@ -5458,13 +5786,13 @@
       </p:sp>
       <p:sp>
         <p:nvSpPr>
-          <p:cNvPr id="6" name="Shape 4"/>
-          <p:cNvSpPr/>
-          <p:nvPr/>
-        </p:nvSpPr>
-        <p:spPr>
-          <a:xfrm>
-            <a:off x="676656" y="1892808"/>
+          <p:cNvPr id="24" name="Shape 24"/>
+          <p:cNvSpPr/>
+          <p:nvPr/>
+        </p:nvSpPr>
+        <p:spPr>
+          <a:xfrm>
+            <a:off x="676656" y="1888236"/>
             <a:ext cx="603504" cy="214884"/>
           </a:xfrm>
           <a:prstGeom prst="roundRect">
@@ -5477,7 +5805,7 @@
           </a:solidFill>
           <a:ln w="12700">
             <a:solidFill>
-              <a:srgbClr val="C1121F"/>
+              <a:srgbClr val="E09F3E"/>
             </a:solidFill>
             <a:prstDash val="solid"/>
           </a:ln>
@@ -5485,13 +5813,13 @@
       </p:sp>
       <p:sp>
         <p:nvSpPr>
-          <p:cNvPr id="7" name="Text 5"/>
-          <p:cNvSpPr/>
-          <p:nvPr/>
-        </p:nvSpPr>
-        <p:spPr>
-          <a:xfrm>
-            <a:off x="676656" y="1892808"/>
+          <p:cNvPr id="25" name="Shape 25"/>
+          <p:cNvSpPr/>
+          <p:nvPr/>
+        </p:nvSpPr>
+        <p:spPr>
+          <a:xfrm>
+            <a:off x="676656" y="1888236"/>
             <a:ext cx="603504" cy="214884"/>
           </a:xfrm>
           <a:prstGeom prst="rect">
@@ -5524,30 +5852,30 @@
       </p:sp>
       <p:sp>
         <p:nvSpPr>
-          <p:cNvPr id="8" name="Text 6"/>
+          <p:cNvPr id="26" name="Shape 26"/>
           <p:cNvSpPr/>
           <p:nvPr/>
         </p:nvSpPr>
         <p:spPr>
           <a:xfrm>
             <a:off x="1408176" y="1755648"/>
-            <a:ext cx="3794760" cy="493776"/>
-          </a:xfrm>
-          <a:prstGeom prst="rect">
-            <a:avLst/>
-          </a:prstGeom>
-          <a:noFill/>
-          <a:ln/>
-        </p:spPr>
-        <p:txBody>
-          <a:bodyPr wrap="square" lIns="0" tIns="0" rIns="0" bIns="0" rtlCol="0" anchor="ctr"/>
-          <a:lstStyle/>
-          <a:p>
-            <a:pPr indent="0" marL="0">
-              <a:buNone/>
-            </a:pPr>
-            <a:r>
-              <a:rPr lang="en-US" sz="1360" b="1" dirty="0">
+            <a:ext cx="3794760" cy="484632"/>
+          </a:xfrm>
+          <a:prstGeom prst="rect">
+            <a:avLst/>
+          </a:prstGeom>
+          <a:noFill/>
+          <a:ln/>
+        </p:spPr>
+        <p:txBody>
+          <a:bodyPr wrap="square" lIns="0" tIns="0" rIns="0" bIns="0" rtlCol="0" anchor="ctr"/>
+          <a:lstStyle/>
+          <a:p>
+            <a:pPr indent="0" marL="0">
+              <a:buNone/>
+            </a:pPr>
+            <a:r>
+              <a:rPr lang="en-US" sz="1200" b="1" dirty="0">
                 <a:solidFill>
                   <a:srgbClr val="14213D"/>
                 </a:solidFill>
@@ -5557,36 +5885,36 @@
               </a:rPr>
               <a:t>Front-running client flow</a:t>
             </a:r>
-            <a:endParaRPr lang="en-US" sz="1360" dirty="0"/>
-          </a:p>
-        </p:txBody>
-      </p:sp>
-      <p:sp>
-        <p:nvSpPr>
-          <p:cNvPr id="9" name="Text 7"/>
+            <a:endParaRPr lang="en-US" sz="1200" dirty="0"/>
+          </a:p>
+        </p:txBody>
+      </p:sp>
+      <p:sp>
+        <p:nvSpPr>
+          <p:cNvPr id="27" name="Shape 27"/>
           <p:cNvSpPr/>
           <p:nvPr/>
         </p:nvSpPr>
         <p:spPr>
           <a:xfrm>
             <a:off x="5276088" y="1755648"/>
-            <a:ext cx="4892040" cy="493776"/>
-          </a:xfrm>
-          <a:prstGeom prst="rect">
-            <a:avLst/>
-          </a:prstGeom>
-          <a:noFill/>
-          <a:ln/>
-        </p:spPr>
-        <p:txBody>
-          <a:bodyPr wrap="square" lIns="0" tIns="0" rIns="0" bIns="0" rtlCol="0" anchor="ctr"/>
-          <a:lstStyle/>
-          <a:p>
-            <a:pPr indent="0" marL="0">
-              <a:buNone/>
-            </a:pPr>
-            <a:r>
-              <a:rPr lang="en-US" sz="1160" dirty="0">
+            <a:ext cx="4892040" cy="484632"/>
+          </a:xfrm>
+          <a:prstGeom prst="rect">
+            <a:avLst/>
+          </a:prstGeom>
+          <a:noFill/>
+          <a:ln/>
+        </p:spPr>
+        <p:txBody>
+          <a:bodyPr wrap="square" lIns="0" tIns="0" rIns="0" bIns="0" rtlCol="0" anchor="ctr"/>
+          <a:lstStyle/>
+          <a:p>
+            <a:pPr indent="0" marL="0">
+              <a:buNone/>
+            </a:pPr>
+            <a:r>
+              <a:rPr lang="en-US" sz="1000" dirty="0">
                 <a:solidFill>
                   <a:srgbClr val="1B2430"/>
                 </a:solidFill>
@@ -5594,22 +5922,22 @@
                 <a:ea typeface="Calibri" pitchFamily="34" charset="-122"/>
                 <a:cs typeface="Calibri" pitchFamily="34" charset="-120"/>
               </a:rPr>
-              <a:t>house trade same instrument &amp; direction, 0–15 min before a client order ≥5× this trader's median ticket, house…</a:t>
-            </a:r>
-            <a:endParaRPr lang="en-US" sz="1160" dirty="0"/>
-          </a:p>
-        </p:txBody>
-      </p:sp>
-      <p:sp>
-        <p:nvSpPr>
-          <p:cNvPr id="10" name="Text 8"/>
+              <a:t>house trade same instrument &amp; direction, 0–15 min before a client order ≥5× this trader's…</a:t>
+            </a:r>
+            <a:endParaRPr lang="en-US" sz="1000" dirty="0"/>
+          </a:p>
+        </p:txBody>
+      </p:sp>
+      <p:sp>
+        <p:nvSpPr>
+          <p:cNvPr id="28" name="Shape 28"/>
           <p:cNvSpPr/>
           <p:nvPr/>
         </p:nvSpPr>
         <p:spPr>
           <a:xfrm>
             <a:off x="10259568" y="1755648"/>
-            <a:ext cx="1280160" cy="493776"/>
+            <a:ext cx="1280160" cy="484632"/>
           </a:xfrm>
           <a:prstGeom prst="rect">
             <a:avLst/>
@@ -5625,7 +5953,7 @@
               <a:buNone/>
             </a:pPr>
             <a:r>
-              <a:rPr lang="en-US" sz="1100" i="1" dirty="0">
+              <a:rPr lang="en-US" sz="940" i="1" dirty="0">
                 <a:solidFill>
                   <a:srgbClr val="8A94A6"/>
                 </a:solidFill>
@@ -5635,19 +5963,19 @@
               </a:rPr>
               <a:t>The trader's own order book and…</a:t>
             </a:r>
-            <a:endParaRPr lang="en-US" sz="1100" dirty="0"/>
-          </a:p>
-        </p:txBody>
-      </p:sp>
-      <p:sp>
-        <p:nvSpPr>
-          <p:cNvPr id="11" name="Shape 9"/>
-          <p:cNvSpPr/>
-          <p:nvPr/>
-        </p:nvSpPr>
-        <p:spPr>
-          <a:xfrm>
-            <a:off x="676656" y="2459736"/>
+            <a:endParaRPr lang="en-US" sz="940" dirty="0"/>
+          </a:p>
+        </p:txBody>
+      </p:sp>
+      <p:sp>
+        <p:nvSpPr>
+          <p:cNvPr id="29" name="Shape 29"/>
+          <p:cNvSpPr/>
+          <p:nvPr/>
+        </p:nvSpPr>
+        <p:spPr>
+          <a:xfrm>
+            <a:off x="676656" y="2446020"/>
             <a:ext cx="603504" cy="214884"/>
           </a:xfrm>
           <a:prstGeom prst="roundRect">
@@ -5660,7 +5988,7 @@
           </a:solidFill>
           <a:ln w="12700">
             <a:solidFill>
-              <a:srgbClr val="C1121F"/>
+              <a:srgbClr val="E09F3E"/>
             </a:solidFill>
             <a:prstDash val="solid"/>
           </a:ln>
@@ -5668,13 +5996,13 @@
       </p:sp>
       <p:sp>
         <p:nvSpPr>
-          <p:cNvPr id="12" name="Text 10"/>
-          <p:cNvSpPr/>
-          <p:nvPr/>
-        </p:nvSpPr>
-        <p:spPr>
-          <a:xfrm>
-            <a:off x="676656" y="2459736"/>
+          <p:cNvPr id="30" name="Shape 30"/>
+          <p:cNvSpPr/>
+          <p:nvPr/>
+        </p:nvSpPr>
+        <p:spPr>
+          <a:xfrm>
+            <a:off x="676656" y="2446020"/>
             <a:ext cx="603504" cy="214884"/>
           </a:xfrm>
           <a:prstGeom prst="rect">
@@ -5707,30 +6035,30 @@
       </p:sp>
       <p:sp>
         <p:nvSpPr>
-          <p:cNvPr id="13" name="Text 11"/>
-          <p:cNvSpPr/>
-          <p:nvPr/>
-        </p:nvSpPr>
-        <p:spPr>
-          <a:xfrm>
-            <a:off x="1408176" y="2322576"/>
-            <a:ext cx="3794760" cy="493776"/>
-          </a:xfrm>
-          <a:prstGeom prst="rect">
-            <a:avLst/>
-          </a:prstGeom>
-          <a:noFill/>
-          <a:ln/>
-        </p:spPr>
-        <p:txBody>
-          <a:bodyPr wrap="square" lIns="0" tIns="0" rIns="0" bIns="0" rtlCol="0" anchor="ctr"/>
-          <a:lstStyle/>
-          <a:p>
-            <a:pPr indent="0" marL="0">
-              <a:buNone/>
-            </a:pPr>
-            <a:r>
-              <a:rPr lang="en-US" sz="1360" b="1" dirty="0">
+          <p:cNvPr id="31" name="Shape 31"/>
+          <p:cNvSpPr/>
+          <p:nvPr/>
+        </p:nvSpPr>
+        <p:spPr>
+          <a:xfrm>
+            <a:off x="1408176" y="2313432"/>
+            <a:ext cx="3794760" cy="484632"/>
+          </a:xfrm>
+          <a:prstGeom prst="rect">
+            <a:avLst/>
+          </a:prstGeom>
+          <a:noFill/>
+          <a:ln/>
+        </p:spPr>
+        <p:txBody>
+          <a:bodyPr wrap="square" lIns="0" tIns="0" rIns="0" bIns="0" rtlCol="0" anchor="ctr"/>
+          <a:lstStyle/>
+          <a:p>
+            <a:pPr indent="0" marL="0">
+              <a:buNone/>
+            </a:pPr>
+            <a:r>
+              <a:rPr lang="en-US" sz="1200" b="1" dirty="0">
                 <a:solidFill>
                   <a:srgbClr val="14213D"/>
                 </a:solidFill>
@@ -5740,36 +6068,36 @@
               </a:rPr>
               <a:t>Post-trade allocation changed between clients</a:t>
             </a:r>
-            <a:endParaRPr lang="en-US" sz="1360" dirty="0"/>
-          </a:p>
-        </p:txBody>
-      </p:sp>
-      <p:sp>
-        <p:nvSpPr>
-          <p:cNvPr id="14" name="Text 12"/>
-          <p:cNvSpPr/>
-          <p:nvPr/>
-        </p:nvSpPr>
-        <p:spPr>
-          <a:xfrm>
-            <a:off x="5276088" y="2322576"/>
-            <a:ext cx="4892040" cy="493776"/>
-          </a:xfrm>
-          <a:prstGeom prst="rect">
-            <a:avLst/>
-          </a:prstGeom>
-          <a:noFill/>
-          <a:ln/>
-        </p:spPr>
-        <p:txBody>
-          <a:bodyPr wrap="square" lIns="0" tIns="0" rIns="0" bIns="0" rtlCol="0" anchor="ctr"/>
-          <a:lstStyle/>
-          <a:p>
-            <a:pPr indent="0" marL="0">
-              <a:buNone/>
-            </a:pPr>
-            <a:r>
-              <a:rPr lang="en-US" sz="1160" dirty="0">
+            <a:endParaRPr lang="en-US" sz="1200" dirty="0"/>
+          </a:p>
+        </p:txBody>
+      </p:sp>
+      <p:sp>
+        <p:nvSpPr>
+          <p:cNvPr id="32" name="Shape 32"/>
+          <p:cNvSpPr/>
+          <p:nvPr/>
+        </p:nvSpPr>
+        <p:spPr>
+          <a:xfrm>
+            <a:off x="5276088" y="2313432"/>
+            <a:ext cx="4892040" cy="484632"/>
+          </a:xfrm>
+          <a:prstGeom prst="rect">
+            <a:avLst/>
+          </a:prstGeom>
+          <a:noFill/>
+          <a:ln/>
+        </p:spPr>
+        <p:txBody>
+          <a:bodyPr wrap="square" lIns="0" tIns="0" rIns="0" bIns="0" rtlCol="0" anchor="ctr"/>
+          <a:lstStyle/>
+          <a:p>
+            <a:pPr indent="0" marL="0">
+              <a:buNone/>
+            </a:pPr>
+            <a:r>
+              <a:rPr lang="en-US" sz="1000" dirty="0">
                 <a:solidFill>
                   <a:srgbClr val="1B2430"/>
                 </a:solidFill>
@@ -5777,22 +6105,22 @@
                 <a:ea typeface="Calibri" pitchFamily="34" charset="-122"/>
                 <a:cs typeface="Calibri" pitchFamily="34" charset="-120"/>
               </a:rPr>
-              <a:t>allocation amended after execution AND the reallocated fills sit &gt;8 bps better than the block average</a:t>
-            </a:r>
-            <a:endParaRPr lang="en-US" sz="1160" dirty="0"/>
-          </a:p>
-        </p:txBody>
-      </p:sp>
-      <p:sp>
-        <p:nvSpPr>
-          <p:cNvPr id="15" name="Text 13"/>
-          <p:cNvSpPr/>
-          <p:nvPr/>
-        </p:nvSpPr>
-        <p:spPr>
-          <a:xfrm>
-            <a:off x="10259568" y="2322576"/>
-            <a:ext cx="1280160" cy="493776"/>
+              <a:t>allocation amended after execution AND the reallocated fills sit &gt;8 bps better than the block…</a:t>
+            </a:r>
+            <a:endParaRPr lang="en-US" sz="1000" dirty="0"/>
+          </a:p>
+        </p:txBody>
+      </p:sp>
+      <p:sp>
+        <p:nvSpPr>
+          <p:cNvPr id="33" name="Shape 33"/>
+          <p:cNvSpPr/>
+          <p:nvPr/>
+        </p:nvSpPr>
+        <p:spPr>
+          <a:xfrm>
+            <a:off x="10259568" y="2313432"/>
+            <a:ext cx="1280160" cy="484632"/>
           </a:xfrm>
           <a:prstGeom prst="rect">
             <a:avLst/>
@@ -5808,7 +6136,7 @@
               <a:buNone/>
             </a:pPr>
             <a:r>
-              <a:rPr lang="en-US" sz="1100" i="1" dirty="0">
+              <a:rPr lang="en-US" sz="940" i="1" dirty="0">
                 <a:solidFill>
                   <a:srgbClr val="8A94A6"/>
                 </a:solidFill>
@@ -5818,20 +6146,20 @@
               </a:rPr>
               <a:t>The trader's own block average…</a:t>
             </a:r>
-            <a:endParaRPr lang="en-US" sz="1100" dirty="0"/>
-          </a:p>
-        </p:txBody>
-      </p:sp>
-      <p:sp>
-        <p:nvSpPr>
-          <p:cNvPr id="16" name="Shape 14"/>
-          <p:cNvSpPr/>
-          <p:nvPr/>
-        </p:nvSpPr>
-        <p:spPr>
-          <a:xfrm>
-            <a:off x="566928" y="2871216"/>
-            <a:ext cx="10881360" cy="530352"/>
+            <a:endParaRPr lang="en-US" sz="940" dirty="0"/>
+          </a:p>
+        </p:txBody>
+      </p:sp>
+      <p:sp>
+        <p:nvSpPr>
+          <p:cNvPr id="34" name="Shape 34"/>
+          <p:cNvSpPr/>
+          <p:nvPr/>
+        </p:nvSpPr>
+        <p:spPr>
+          <a:xfrm>
+            <a:off x="566928" y="2852928"/>
+            <a:ext cx="10881360" cy="521208"/>
           </a:xfrm>
           <a:prstGeom prst="rect">
             <a:avLst/>
@@ -5849,13 +6177,13 @@
       </p:sp>
       <p:sp>
         <p:nvSpPr>
-          <p:cNvPr id="17" name="Shape 15"/>
-          <p:cNvSpPr/>
-          <p:nvPr/>
-        </p:nvSpPr>
-        <p:spPr>
-          <a:xfrm>
-            <a:off x="676656" y="3026664"/>
+          <p:cNvPr id="35" name="Shape 35"/>
+          <p:cNvSpPr/>
+          <p:nvPr/>
+        </p:nvSpPr>
+        <p:spPr>
+          <a:xfrm>
+            <a:off x="676656" y="3003804"/>
             <a:ext cx="603504" cy="214884"/>
           </a:xfrm>
           <a:prstGeom prst="roundRect">
@@ -5868,7 +6196,7 @@
           </a:solidFill>
           <a:ln w="12700">
             <a:solidFill>
-              <a:srgbClr val="335C81"/>
+              <a:srgbClr val="E09F3E"/>
             </a:solidFill>
             <a:prstDash val="solid"/>
           </a:ln>
@@ -5876,13 +6204,13 @@
       </p:sp>
       <p:sp>
         <p:nvSpPr>
-          <p:cNvPr id="18" name="Text 16"/>
-          <p:cNvSpPr/>
-          <p:nvPr/>
-        </p:nvSpPr>
-        <p:spPr>
-          <a:xfrm>
-            <a:off x="676656" y="3026664"/>
+          <p:cNvPr id="36" name="Shape 36"/>
+          <p:cNvSpPr/>
+          <p:nvPr/>
+        </p:nvSpPr>
+        <p:spPr>
+          <a:xfrm>
+            <a:off x="676656" y="3003804"/>
             <a:ext cx="603504" cy="214884"/>
           </a:xfrm>
           <a:prstGeom prst="rect">
@@ -5915,30 +6243,30 @@
       </p:sp>
       <p:sp>
         <p:nvSpPr>
-          <p:cNvPr id="19" name="Text 17"/>
-          <p:cNvSpPr/>
-          <p:nvPr/>
-        </p:nvSpPr>
-        <p:spPr>
-          <a:xfrm>
-            <a:off x="1408176" y="2889504"/>
-            <a:ext cx="3794760" cy="493776"/>
-          </a:xfrm>
-          <a:prstGeom prst="rect">
-            <a:avLst/>
-          </a:prstGeom>
-          <a:noFill/>
-          <a:ln/>
-        </p:spPr>
-        <p:txBody>
-          <a:bodyPr wrap="square" lIns="0" tIns="0" rIns="0" bIns="0" rtlCol="0" anchor="ctr"/>
-          <a:lstStyle/>
-          <a:p>
-            <a:pPr indent="0" marL="0">
-              <a:buNone/>
-            </a:pPr>
-            <a:r>
-              <a:rPr lang="en-US" sz="1360" b="1" dirty="0">
+          <p:cNvPr id="37" name="Shape 37"/>
+          <p:cNvSpPr/>
+          <p:nvPr/>
+        </p:nvSpPr>
+        <p:spPr>
+          <a:xfrm>
+            <a:off x="1408176" y="2871216"/>
+            <a:ext cx="3794760" cy="484632"/>
+          </a:xfrm>
+          <a:prstGeom prst="rect">
+            <a:avLst/>
+          </a:prstGeom>
+          <a:noFill/>
+          <a:ln/>
+        </p:spPr>
+        <p:txBody>
+          <a:bodyPr wrap="square" lIns="0" tIns="0" rIns="0" bIns="0" rtlCol="0" anchor="ctr"/>
+          <a:lstStyle/>
+          <a:p>
+            <a:pPr indent="0" marL="0">
+              <a:buNone/>
+            </a:pPr>
+            <a:r>
+              <a:rPr lang="en-US" sz="1200" b="1" dirty="0">
                 <a:solidFill>
                   <a:srgbClr val="14213D"/>
                 </a:solidFill>
@@ -5948,36 +6276,36 @@
               </a:rPr>
               <a:t>Counterparty concentration</a:t>
             </a:r>
-            <a:endParaRPr lang="en-US" sz="1360" dirty="0"/>
-          </a:p>
-        </p:txBody>
-      </p:sp>
-      <p:sp>
-        <p:nvSpPr>
-          <p:cNvPr id="20" name="Text 18"/>
-          <p:cNvSpPr/>
-          <p:nvPr/>
-        </p:nvSpPr>
-        <p:spPr>
-          <a:xfrm>
-            <a:off x="5276088" y="2889504"/>
-            <a:ext cx="4892040" cy="493776"/>
-          </a:xfrm>
-          <a:prstGeom prst="rect">
-            <a:avLst/>
-          </a:prstGeom>
-          <a:noFill/>
-          <a:ln/>
-        </p:spPr>
-        <p:txBody>
-          <a:bodyPr wrap="square" lIns="0" tIns="0" rIns="0" bIns="0" rtlCol="0" anchor="ctr"/>
-          <a:lstStyle/>
-          <a:p>
-            <a:pPr indent="0" marL="0">
-              <a:buNone/>
-            </a:pPr>
-            <a:r>
-              <a:rPr lang="en-US" sz="1160" dirty="0">
+            <a:endParaRPr lang="en-US" sz="1200" dirty="0"/>
+          </a:p>
+        </p:txBody>
+      </p:sp>
+      <p:sp>
+        <p:nvSpPr>
+          <p:cNvPr id="38" name="Shape 38"/>
+          <p:cNvSpPr/>
+          <p:nvPr/>
+        </p:nvSpPr>
+        <p:spPr>
+          <a:xfrm>
+            <a:off x="5276088" y="2871216"/>
+            <a:ext cx="4892040" cy="484632"/>
+          </a:xfrm>
+          <a:prstGeom prst="rect">
+            <a:avLst/>
+          </a:prstGeom>
+          <a:noFill/>
+          <a:ln/>
+        </p:spPr>
+        <p:txBody>
+          <a:bodyPr wrap="square" lIns="0" tIns="0" rIns="0" bIns="0" rtlCol="0" anchor="ctr"/>
+          <a:lstStyle/>
+          <a:p>
+            <a:pPr indent="0" marL="0">
+              <a:buNone/>
+            </a:pPr>
+            <a:r>
+              <a:rPr lang="en-US" sz="1000" dirty="0">
                 <a:solidFill>
                   <a:srgbClr val="1B2430"/>
                 </a:solidFill>
@@ -5985,22 +6313,22 @@
                 <a:ea typeface="Calibri" pitchFamily="34" charset="-122"/>
                 <a:cs typeface="Calibri" pitchFamily="34" charset="-120"/>
               </a:rPr>
-              <a:t>one counterparty &gt; this trader's concentration cap of their tickets over 20 business days, against a peer-cohort…</a:t>
-            </a:r>
-            <a:endParaRPr lang="en-US" sz="1160" dirty="0"/>
-          </a:p>
-        </p:txBody>
-      </p:sp>
-      <p:sp>
-        <p:nvSpPr>
-          <p:cNvPr id="21" name="Text 19"/>
-          <p:cNvSpPr/>
-          <p:nvPr/>
-        </p:nvSpPr>
-        <p:spPr>
-          <a:xfrm>
-            <a:off x="10259568" y="2889504"/>
-            <a:ext cx="1280160" cy="493776"/>
+              <a:t>one counterparty &gt; this trader's concentration cap of their tickets over 20 business days…</a:t>
+            </a:r>
+            <a:endParaRPr lang="en-US" sz="1000" dirty="0"/>
+          </a:p>
+        </p:txBody>
+      </p:sp>
+      <p:sp>
+        <p:nvSpPr>
+          <p:cNvPr id="39" name="Shape 39"/>
+          <p:cNvSpPr/>
+          <p:nvPr/>
+        </p:nvSpPr>
+        <p:spPr>
+          <a:xfrm>
+            <a:off x="10259568" y="2871216"/>
+            <a:ext cx="1280160" cy="484632"/>
           </a:xfrm>
           <a:prstGeom prst="rect">
             <a:avLst/>
@@ -6016,7 +6344,7 @@
               <a:buNone/>
             </a:pPr>
             <a:r>
-              <a:rPr lang="en-US" sz="1100" i="1" dirty="0">
+              <a:rPr lang="en-US" sz="940" i="1" dirty="0">
                 <a:solidFill>
                   <a:srgbClr val="8A94A6"/>
                 </a:solidFill>
@@ -6026,7 +6354,972 @@
               </a:rPr>
               <a:t>The trader's own counterparty mix…</a:t>
             </a:r>
-            <a:endParaRPr lang="en-US" sz="1100" dirty="0"/>
+            <a:endParaRPr lang="en-US" sz="940" dirty="0"/>
+          </a:p>
+        </p:txBody>
+      </p:sp>
+      <p:sp>
+        <p:nvSpPr>
+          <p:cNvPr id="40" name="Shape 40"/>
+          <p:cNvSpPr/>
+          <p:nvPr/>
+        </p:nvSpPr>
+        <p:spPr>
+          <a:xfrm>
+            <a:off x="676656" y="3561588"/>
+            <a:ext cx="603504" cy="214884"/>
+          </a:xfrm>
+          <a:prstGeom prst="roundRect">
+            <a:avLst>
+              <a:gd name="adj" fmla="val 25532"/>
+            </a:avLst>
+          </a:prstGeom>
+          <a:solidFill>
+            <a:srgbClr val="E09F3E"/>
+          </a:solidFill>
+          <a:ln w="12700">
+            <a:solidFill>
+              <a:srgbClr val="E09F3E"/>
+            </a:solidFill>
+            <a:prstDash val="solid"/>
+          </a:ln>
+        </p:spPr>
+      </p:sp>
+      <p:sp>
+        <p:nvSpPr>
+          <p:cNvPr id="41" name="Shape 41"/>
+          <p:cNvSpPr/>
+          <p:nvPr/>
+        </p:nvSpPr>
+        <p:spPr>
+          <a:xfrm>
+            <a:off x="676656" y="3561588"/>
+            <a:ext cx="603504" cy="214884"/>
+          </a:xfrm>
+          <a:prstGeom prst="rect">
+            <a:avLst/>
+          </a:prstGeom>
+          <a:noFill/>
+          <a:ln/>
+        </p:spPr>
+        <p:txBody>
+          <a:bodyPr wrap="square" lIns="0" tIns="0" rIns="0" bIns="0" rtlCol="0" anchor="ctr"/>
+          <a:lstStyle/>
+          <a:p>
+            <a:pPr algn="ctr" indent="0" marL="0">
+              <a:buNone/>
+            </a:pPr>
+            <a:r>
+              <a:rPr lang="en-US" sz="950" b="1" dirty="0">
+                <a:solidFill>
+                  <a:srgbClr val="FFFFFF"/>
+                </a:solidFill>
+                <a:latin typeface="Courier New" pitchFamily="34" charset="0"/>
+                <a:ea typeface="Courier New" pitchFamily="34" charset="-122"/>
+                <a:cs typeface="Courier New" pitchFamily="34" charset="-120"/>
+              </a:rPr>
+              <a:t>TS-51</a:t>
+            </a:r>
+            <a:endParaRPr lang="en-US" sz="950" dirty="0"/>
+          </a:p>
+        </p:txBody>
+      </p:sp>
+      <p:sp>
+        <p:nvSpPr>
+          <p:cNvPr id="42" name="Shape 42"/>
+          <p:cNvSpPr/>
+          <p:nvPr/>
+        </p:nvSpPr>
+        <p:spPr>
+          <a:xfrm>
+            <a:off x="1408176" y="3429000"/>
+            <a:ext cx="3794760" cy="484632"/>
+          </a:xfrm>
+          <a:prstGeom prst="rect">
+            <a:avLst/>
+          </a:prstGeom>
+          <a:noFill/>
+          <a:ln/>
+        </p:spPr>
+        <p:txBody>
+          <a:bodyPr wrap="square" lIns="0" tIns="0" rIns="0" bIns="0" rtlCol="0" anchor="ctr"/>
+          <a:lstStyle/>
+          <a:p>
+            <a:pPr indent="0" marL="0">
+              <a:buNone/>
+            </a:pPr>
+            <a:r>
+              <a:rPr lang="en-US" sz="1200" b="1" dirty="0">
+                <a:solidFill>
+                  <a:srgbClr val="14213D"/>
+                </a:solidFill>
+                <a:latin typeface="Calibri" pitchFamily="34" charset="0"/>
+                <a:ea typeface="Calibri" pitchFamily="34" charset="-122"/>
+                <a:cs typeface="Calibri" pitchFamily="34" charset="-120"/>
+              </a:rPr>
+              <a:t>Excessive mark-up against comparable clients</a:t>
+            </a:r>
+            <a:endParaRPr lang="en-US" sz="1200" dirty="0"/>
+          </a:p>
+        </p:txBody>
+      </p:sp>
+      <p:sp>
+        <p:nvSpPr>
+          <p:cNvPr id="43" name="Shape 43"/>
+          <p:cNvSpPr/>
+          <p:nvPr/>
+        </p:nvSpPr>
+        <p:spPr>
+          <a:xfrm>
+            <a:off x="5276088" y="3429000"/>
+            <a:ext cx="4892040" cy="484632"/>
+          </a:xfrm>
+          <a:prstGeom prst="rect">
+            <a:avLst/>
+          </a:prstGeom>
+          <a:noFill/>
+          <a:ln/>
+        </p:spPr>
+        <p:txBody>
+          <a:bodyPr wrap="square" lIns="0" tIns="0" rIns="0" bIns="0" rtlCol="0" anchor="ctr"/>
+          <a:lstStyle/>
+          <a:p>
+            <a:pPr indent="0" marL="0">
+              <a:buNone/>
+            </a:pPr>
+            <a:r>
+              <a:rPr lang="en-US" sz="1000" dirty="0">
+                <a:solidFill>
+                  <a:srgbClr val="1B2430"/>
+                </a:solidFill>
+                <a:latin typeface="Calibri" pitchFamily="34" charset="0"/>
+                <a:ea typeface="Calibri" pitchFamily="34" charset="-122"/>
+                <a:cs typeface="Calibri" pitchFamily="34" charset="-120"/>
+              </a:rPr>
+              <a:t>≥5 deals with one client over 20 business days at a margin &gt; 2.5× the median that clients of…</a:t>
+            </a:r>
+            <a:endParaRPr lang="en-US" sz="1000" dirty="0"/>
+          </a:p>
+        </p:txBody>
+      </p:sp>
+      <p:sp>
+        <p:nvSpPr>
+          <p:cNvPr id="44" name="Shape 44"/>
+          <p:cNvSpPr/>
+          <p:nvPr/>
+        </p:nvSpPr>
+        <p:spPr>
+          <a:xfrm>
+            <a:off x="10259568" y="3429000"/>
+            <a:ext cx="1280160" cy="484632"/>
+          </a:xfrm>
+          <a:prstGeom prst="rect">
+            <a:avLst/>
+          </a:prstGeom>
+          <a:noFill/>
+          <a:ln/>
+        </p:spPr>
+        <p:txBody>
+          <a:bodyPr wrap="square" lIns="0" tIns="0" rIns="0" bIns="0" rtlCol="0" anchor="ctr"/>
+          <a:lstStyle/>
+          <a:p>
+            <a:pPr algn="r" indent="0" marL="0">
+              <a:buNone/>
+            </a:pPr>
+            <a:r>
+              <a:rPr lang="en-US" sz="940" i="1" dirty="0">
+                <a:solidFill>
+                  <a:srgbClr val="8A94A6"/>
+                </a:solidFill>
+                <a:latin typeface="Calibri" pitchFamily="34" charset="0"/>
+                <a:ea typeface="Calibri" pitchFamily="34" charset="-122"/>
+                <a:cs typeface="Calibri" pitchFamily="34" charset="-120"/>
+              </a:rPr>
+              <a:t>What clients of the same type pay…</a:t>
+            </a:r>
+            <a:endParaRPr lang="en-US" sz="940" dirty="0"/>
+          </a:p>
+        </p:txBody>
+      </p:sp>
+      <p:sp>
+        <p:nvSpPr>
+          <p:cNvPr id="45" name="Shape 45"/>
+          <p:cNvSpPr/>
+          <p:nvPr/>
+        </p:nvSpPr>
+        <p:spPr>
+          <a:xfrm>
+            <a:off x="566928" y="3968496"/>
+            <a:ext cx="10881360" cy="521208"/>
+          </a:xfrm>
+          <a:prstGeom prst="rect">
+            <a:avLst/>
+          </a:prstGeom>
+          <a:solidFill>
+            <a:srgbClr val="F6F8FB"/>
+          </a:solidFill>
+          <a:ln w="12700">
+            <a:solidFill>
+              <a:srgbClr val="F6F8FB"/>
+            </a:solidFill>
+            <a:prstDash val="solid"/>
+          </a:ln>
+        </p:spPr>
+      </p:sp>
+      <p:sp>
+        <p:nvSpPr>
+          <p:cNvPr id="46" name="Shape 46"/>
+          <p:cNvSpPr/>
+          <p:nvPr/>
+        </p:nvSpPr>
+        <p:spPr>
+          <a:xfrm>
+            <a:off x="676656" y="4119372"/>
+            <a:ext cx="603504" cy="214884"/>
+          </a:xfrm>
+          <a:prstGeom prst="roundRect">
+            <a:avLst>
+              <a:gd name="adj" fmla="val 25532"/>
+            </a:avLst>
+          </a:prstGeom>
+          <a:solidFill>
+            <a:srgbClr val="335C81"/>
+          </a:solidFill>
+          <a:ln w="12700">
+            <a:solidFill>
+              <a:srgbClr val="E09F3E"/>
+            </a:solidFill>
+            <a:prstDash val="solid"/>
+          </a:ln>
+        </p:spPr>
+      </p:sp>
+      <p:sp>
+        <p:nvSpPr>
+          <p:cNvPr id="47" name="Shape 47"/>
+          <p:cNvSpPr/>
+          <p:nvPr/>
+        </p:nvSpPr>
+        <p:spPr>
+          <a:xfrm>
+            <a:off x="676656" y="4119372"/>
+            <a:ext cx="603504" cy="214884"/>
+          </a:xfrm>
+          <a:prstGeom prst="rect">
+            <a:avLst/>
+          </a:prstGeom>
+          <a:noFill/>
+          <a:ln/>
+        </p:spPr>
+        <p:txBody>
+          <a:bodyPr wrap="square" lIns="0" tIns="0" rIns="0" bIns="0" rtlCol="0" anchor="ctr"/>
+          <a:lstStyle/>
+          <a:p>
+            <a:pPr algn="ctr" indent="0" marL="0">
+              <a:buNone/>
+            </a:pPr>
+            <a:r>
+              <a:rPr lang="en-US" sz="950" b="1" dirty="0">
+                <a:solidFill>
+                  <a:srgbClr val="FFFFFF"/>
+                </a:solidFill>
+                <a:latin typeface="Courier New" pitchFamily="34" charset="0"/>
+                <a:ea typeface="Courier New" pitchFamily="34" charset="-122"/>
+                <a:cs typeface="Courier New" pitchFamily="34" charset="-120"/>
+              </a:rPr>
+              <a:t>TS-52</a:t>
+            </a:r>
+            <a:endParaRPr lang="en-US" sz="950" dirty="0"/>
+          </a:p>
+        </p:txBody>
+      </p:sp>
+      <p:sp>
+        <p:nvSpPr>
+          <p:cNvPr id="48" name="Shape 48"/>
+          <p:cNvSpPr/>
+          <p:nvPr/>
+        </p:nvSpPr>
+        <p:spPr>
+          <a:xfrm>
+            <a:off x="1408176" y="3986784"/>
+            <a:ext cx="3794760" cy="484632"/>
+          </a:xfrm>
+          <a:prstGeom prst="rect">
+            <a:avLst/>
+          </a:prstGeom>
+          <a:noFill/>
+          <a:ln/>
+        </p:spPr>
+        <p:txBody>
+          <a:bodyPr wrap="square" lIns="0" tIns="0" rIns="0" bIns="0" rtlCol="0" anchor="ctr"/>
+          <a:lstStyle/>
+          <a:p>
+            <a:pPr indent="0" marL="0">
+              <a:buNone/>
+            </a:pPr>
+            <a:r>
+              <a:rPr lang="en-US" sz="1200" b="1" dirty="0">
+                <a:solidFill>
+                  <a:srgbClr val="14213D"/>
+                </a:solidFill>
+                <a:latin typeface="Calibri" pitchFamily="34" charset="0"/>
+                <a:ea typeface="Calibri" pitchFamily="34" charset="-122"/>
+                <a:cs typeface="Calibri" pitchFamily="34" charset="-120"/>
+              </a:rPr>
+              <a:t>Mark-up concentrated on voice</a:t>
+            </a:r>
+            <a:endParaRPr lang="en-US" sz="1200" dirty="0"/>
+          </a:p>
+        </p:txBody>
+      </p:sp>
+      <p:sp>
+        <p:nvSpPr>
+          <p:cNvPr id="49" name="Shape 49"/>
+          <p:cNvSpPr/>
+          <p:nvPr/>
+        </p:nvSpPr>
+        <p:spPr>
+          <a:xfrm>
+            <a:off x="5276088" y="3986784"/>
+            <a:ext cx="4892040" cy="484632"/>
+          </a:xfrm>
+          <a:prstGeom prst="rect">
+            <a:avLst/>
+          </a:prstGeom>
+          <a:noFill/>
+          <a:ln/>
+        </p:spPr>
+        <p:txBody>
+          <a:bodyPr wrap="square" lIns="0" tIns="0" rIns="0" bIns="0" rtlCol="0" anchor="ctr"/>
+          <a:lstStyle/>
+          <a:p>
+            <a:pPr indent="0" marL="0">
+              <a:buNone/>
+            </a:pPr>
+            <a:r>
+              <a:rPr lang="en-US" sz="1000" dirty="0">
+                <a:solidFill>
+                  <a:srgbClr val="1B2430"/>
+                </a:solidFill>
+                <a:latin typeface="Calibri" pitchFamily="34" charset="0"/>
+                <a:ea typeface="Calibri" pitchFamily="34" charset="-122"/>
+                <a:cs typeface="Calibri" pitchFamily="34" charset="-120"/>
+              </a:rPr>
+              <a:t>the same client's margin on voice deals &gt; 2× their margin on electronic deals in the same…</a:t>
+            </a:r>
+            <a:endParaRPr lang="en-US" sz="1000" dirty="0"/>
+          </a:p>
+        </p:txBody>
+      </p:sp>
+      <p:sp>
+        <p:nvSpPr>
+          <p:cNvPr id="50" name="Shape 50"/>
+          <p:cNvSpPr/>
+          <p:nvPr/>
+        </p:nvSpPr>
+        <p:spPr>
+          <a:xfrm>
+            <a:off x="10259568" y="3986784"/>
+            <a:ext cx="1280160" cy="484632"/>
+          </a:xfrm>
+          <a:prstGeom prst="rect">
+            <a:avLst/>
+          </a:prstGeom>
+          <a:noFill/>
+          <a:ln/>
+        </p:spPr>
+        <p:txBody>
+          <a:bodyPr wrap="square" lIns="0" tIns="0" rIns="0" bIns="0" rtlCol="0" anchor="ctr"/>
+          <a:lstStyle/>
+          <a:p>
+            <a:pPr algn="r" indent="0" marL="0">
+              <a:buNone/>
+            </a:pPr>
+            <a:r>
+              <a:rPr lang="en-US" sz="940" i="1" dirty="0">
+                <a:solidFill>
+                  <a:srgbClr val="8A94A6"/>
+                </a:solidFill>
+                <a:latin typeface="Calibri" pitchFamily="34" charset="0"/>
+                <a:ea typeface="Calibri" pitchFamily="34" charset="-122"/>
+                <a:cs typeface="Calibri" pitchFamily="34" charset="-120"/>
+              </a:rPr>
+              <a:t>The same client's own electronic…</a:t>
+            </a:r>
+            <a:endParaRPr lang="en-US" sz="940" dirty="0"/>
+          </a:p>
+        </p:txBody>
+      </p:sp>
+      <p:sp>
+        <p:nvSpPr>
+          <p:cNvPr id="51" name="Shape 51"/>
+          <p:cNvSpPr/>
+          <p:nvPr/>
+        </p:nvSpPr>
+        <p:spPr>
+          <a:xfrm>
+            <a:off x="676656" y="4677156"/>
+            <a:ext cx="603504" cy="214884"/>
+          </a:xfrm>
+          <a:prstGeom prst="roundRect">
+            <a:avLst>
+              <a:gd name="adj" fmla="val 25532"/>
+            </a:avLst>
+          </a:prstGeom>
+          <a:solidFill>
+            <a:srgbClr val="335C81"/>
+          </a:solidFill>
+          <a:ln w="12700">
+            <a:solidFill>
+              <a:srgbClr val="E09F3E"/>
+            </a:solidFill>
+            <a:prstDash val="solid"/>
+          </a:ln>
+        </p:spPr>
+      </p:sp>
+      <p:sp>
+        <p:nvSpPr>
+          <p:cNvPr id="52" name="Shape 52"/>
+          <p:cNvSpPr/>
+          <p:nvPr/>
+        </p:nvSpPr>
+        <p:spPr>
+          <a:xfrm>
+            <a:off x="676656" y="4677156"/>
+            <a:ext cx="603504" cy="214884"/>
+          </a:xfrm>
+          <a:prstGeom prst="rect">
+            <a:avLst/>
+          </a:prstGeom>
+          <a:noFill/>
+          <a:ln/>
+        </p:spPr>
+        <p:txBody>
+          <a:bodyPr wrap="square" lIns="0" tIns="0" rIns="0" bIns="0" rtlCol="0" anchor="ctr"/>
+          <a:lstStyle/>
+          <a:p>
+            <a:pPr algn="ctr" indent="0" marL="0">
+              <a:buNone/>
+            </a:pPr>
+            <a:r>
+              <a:rPr lang="en-US" sz="950" b="1" dirty="0">
+                <a:solidFill>
+                  <a:srgbClr val="FFFFFF"/>
+                </a:solidFill>
+                <a:latin typeface="Courier New" pitchFamily="34" charset="0"/>
+                <a:ea typeface="Courier New" pitchFamily="34" charset="-122"/>
+                <a:cs typeface="Courier New" pitchFamily="34" charset="-120"/>
+              </a:rPr>
+              <a:t>TS-53</a:t>
+            </a:r>
+            <a:endParaRPr lang="en-US" sz="950" dirty="0"/>
+          </a:p>
+        </p:txBody>
+      </p:sp>
+      <p:sp>
+        <p:nvSpPr>
+          <p:cNvPr id="53" name="Shape 53"/>
+          <p:cNvSpPr/>
+          <p:nvPr/>
+        </p:nvSpPr>
+        <p:spPr>
+          <a:xfrm>
+            <a:off x="1408176" y="4544568"/>
+            <a:ext cx="3794760" cy="484632"/>
+          </a:xfrm>
+          <a:prstGeom prst="rect">
+            <a:avLst/>
+          </a:prstGeom>
+          <a:noFill/>
+          <a:ln/>
+        </p:spPr>
+        <p:txBody>
+          <a:bodyPr wrap="square" lIns="0" tIns="0" rIns="0" bIns="0" rtlCol="0" anchor="ctr"/>
+          <a:lstStyle/>
+          <a:p>
+            <a:pPr indent="0" marL="0">
+              <a:buNone/>
+            </a:pPr>
+            <a:r>
+              <a:rPr lang="en-US" sz="1200" b="1" dirty="0">
+                <a:solidFill>
+                  <a:srgbClr val="14213D"/>
+                </a:solidFill>
+                <a:latin typeface="Calibri" pitchFamily="34" charset="0"/>
+                <a:ea typeface="Calibri" pitchFamily="34" charset="-122"/>
+                <a:cs typeface="Calibri" pitchFamily="34" charset="-120"/>
+              </a:rPr>
+              <a:t>Revenue concentration out of line with volume</a:t>
+            </a:r>
+            <a:endParaRPr lang="en-US" sz="1200" dirty="0"/>
+          </a:p>
+        </p:txBody>
+      </p:sp>
+      <p:sp>
+        <p:nvSpPr>
+          <p:cNvPr id="54" name="Shape 54"/>
+          <p:cNvSpPr/>
+          <p:nvPr/>
+        </p:nvSpPr>
+        <p:spPr>
+          <a:xfrm>
+            <a:off x="5276088" y="4544568"/>
+            <a:ext cx="4892040" cy="484632"/>
+          </a:xfrm>
+          <a:prstGeom prst="rect">
+            <a:avLst/>
+          </a:prstGeom>
+          <a:noFill/>
+          <a:ln/>
+        </p:spPr>
+        <p:txBody>
+          <a:bodyPr wrap="square" lIns="0" tIns="0" rIns="0" bIns="0" rtlCol="0" anchor="ctr"/>
+          <a:lstStyle/>
+          <a:p>
+            <a:pPr indent="0" marL="0">
+              <a:buNone/>
+            </a:pPr>
+            <a:r>
+              <a:rPr lang="en-US" sz="1000" dirty="0">
+                <a:solidFill>
+                  <a:srgbClr val="1B2430"/>
+                </a:solidFill>
+                <a:latin typeface="Calibri" pitchFamily="34" charset="0"/>
+                <a:ea typeface="Calibri" pitchFamily="34" charset="-122"/>
+                <a:cs typeface="Calibri" pitchFamily="34" charset="-120"/>
+              </a:rPr>
+              <a:t>one client &gt; 35% of this trader's client revenue over 60 business days while &lt; 10% of their…</a:t>
+            </a:r>
+            <a:endParaRPr lang="en-US" sz="1000" dirty="0"/>
+          </a:p>
+        </p:txBody>
+      </p:sp>
+      <p:sp>
+        <p:nvSpPr>
+          <p:cNvPr id="55" name="Shape 55"/>
+          <p:cNvSpPr/>
+          <p:nvPr/>
+        </p:nvSpPr>
+        <p:spPr>
+          <a:xfrm>
+            <a:off x="10259568" y="4544568"/>
+            <a:ext cx="1280160" cy="484632"/>
+          </a:xfrm>
+          <a:prstGeom prst="rect">
+            <a:avLst/>
+          </a:prstGeom>
+          <a:noFill/>
+          <a:ln/>
+        </p:spPr>
+        <p:txBody>
+          <a:bodyPr wrap="square" lIns="0" tIns="0" rIns="0" bIns="0" rtlCol="0" anchor="ctr"/>
+          <a:lstStyle/>
+          <a:p>
+            <a:pPr algn="r" indent="0" marL="0">
+              <a:buNone/>
+            </a:pPr>
+            <a:r>
+              <a:rPr lang="en-US" sz="940" i="1" dirty="0">
+                <a:solidFill>
+                  <a:srgbClr val="8A94A6"/>
+                </a:solidFill>
+                <a:latin typeface="Calibri" pitchFamily="34" charset="0"/>
+                <a:ea typeface="Calibri" pitchFamily="34" charset="-122"/>
+                <a:cs typeface="Calibri" pitchFamily="34" charset="-120"/>
+              </a:rPr>
+              <a:t>The trader's own revenue and…</a:t>
+            </a:r>
+            <a:endParaRPr lang="en-US" sz="940" dirty="0"/>
+          </a:p>
+        </p:txBody>
+      </p:sp>
+      <p:sp>
+        <p:nvSpPr>
+          <p:cNvPr id="56" name="Shape 56"/>
+          <p:cNvSpPr/>
+          <p:nvPr/>
+        </p:nvSpPr>
+        <p:spPr>
+          <a:xfrm>
+            <a:off x="566928" y="5084064"/>
+            <a:ext cx="10881360" cy="521208"/>
+          </a:xfrm>
+          <a:prstGeom prst="rect">
+            <a:avLst/>
+          </a:prstGeom>
+          <a:solidFill>
+            <a:srgbClr val="F6F8FB"/>
+          </a:solidFill>
+          <a:ln w="12700">
+            <a:solidFill>
+              <a:srgbClr val="F6F8FB"/>
+            </a:solidFill>
+            <a:prstDash val="solid"/>
+          </a:ln>
+        </p:spPr>
+      </p:sp>
+      <p:sp>
+        <p:nvSpPr>
+          <p:cNvPr id="57" name="Shape 57"/>
+          <p:cNvSpPr/>
+          <p:nvPr/>
+        </p:nvSpPr>
+        <p:spPr>
+          <a:xfrm>
+            <a:off x="676656" y="5234940"/>
+            <a:ext cx="603504" cy="214884"/>
+          </a:xfrm>
+          <a:prstGeom prst="roundRect">
+            <a:avLst>
+              <a:gd name="adj" fmla="val 25532"/>
+            </a:avLst>
+          </a:prstGeom>
+          <a:solidFill>
+            <a:srgbClr val="335C81"/>
+          </a:solidFill>
+          <a:ln w="12700">
+            <a:solidFill>
+              <a:srgbClr val="E09F3E"/>
+            </a:solidFill>
+            <a:prstDash val="solid"/>
+          </a:ln>
+        </p:spPr>
+      </p:sp>
+      <p:sp>
+        <p:nvSpPr>
+          <p:cNvPr id="58" name="Shape 58"/>
+          <p:cNvSpPr/>
+          <p:nvPr/>
+        </p:nvSpPr>
+        <p:spPr>
+          <a:xfrm>
+            <a:off x="676656" y="5234940"/>
+            <a:ext cx="603504" cy="214884"/>
+          </a:xfrm>
+          <a:prstGeom prst="rect">
+            <a:avLst/>
+          </a:prstGeom>
+          <a:noFill/>
+          <a:ln/>
+        </p:spPr>
+        <p:txBody>
+          <a:bodyPr wrap="square" lIns="0" tIns="0" rIns="0" bIns="0" rtlCol="0" anchor="ctr"/>
+          <a:lstStyle/>
+          <a:p>
+            <a:pPr algn="ctr" indent="0" marL="0">
+              <a:buNone/>
+            </a:pPr>
+            <a:r>
+              <a:rPr lang="en-US" sz="950" b="1" dirty="0">
+                <a:solidFill>
+                  <a:srgbClr val="FFFFFF"/>
+                </a:solidFill>
+                <a:latin typeface="Courier New" pitchFamily="34" charset="0"/>
+                <a:ea typeface="Courier New" pitchFamily="34" charset="-122"/>
+                <a:cs typeface="Courier New" pitchFamily="34" charset="-120"/>
+              </a:rPr>
+              <a:t>TS-56</a:t>
+            </a:r>
+            <a:endParaRPr lang="en-US" sz="950" dirty="0"/>
+          </a:p>
+        </p:txBody>
+      </p:sp>
+      <p:sp>
+        <p:nvSpPr>
+          <p:cNvPr id="59" name="Shape 59"/>
+          <p:cNvSpPr/>
+          <p:nvPr/>
+        </p:nvSpPr>
+        <p:spPr>
+          <a:xfrm>
+            <a:off x="1408176" y="5102352"/>
+            <a:ext cx="3794760" cy="484632"/>
+          </a:xfrm>
+          <a:prstGeom prst="rect">
+            <a:avLst/>
+          </a:prstGeom>
+          <a:noFill/>
+          <a:ln/>
+        </p:spPr>
+        <p:txBody>
+          <a:bodyPr wrap="square" lIns="0" tIns="0" rIns="0" bIns="0" rtlCol="0" anchor="ctr"/>
+          <a:lstStyle/>
+          <a:p>
+            <a:pPr indent="0" marL="0">
+              <a:buNone/>
+            </a:pPr>
+            <a:r>
+              <a:rPr lang="en-US" sz="1200" b="1" dirty="0">
+                <a:solidFill>
+                  <a:srgbClr val="14213D"/>
+                </a:solidFill>
+                <a:latin typeface="Calibri" pitchFamily="34" charset="0"/>
+                <a:ea typeface="Calibri" pitchFamily="34" charset="-122"/>
+                <a:cs typeface="Calibri" pitchFamily="34" charset="-120"/>
+              </a:rPr>
+              <a:t>Spread given away on external flow</a:t>
+            </a:r>
+            <a:endParaRPr lang="en-US" sz="1200" dirty="0"/>
+          </a:p>
+        </p:txBody>
+      </p:sp>
+      <p:sp>
+        <p:nvSpPr>
+          <p:cNvPr id="60" name="Shape 60"/>
+          <p:cNvSpPr/>
+          <p:nvPr/>
+        </p:nvSpPr>
+        <p:spPr>
+          <a:xfrm>
+            <a:off x="5276088" y="5102352"/>
+            <a:ext cx="4892040" cy="484632"/>
+          </a:xfrm>
+          <a:prstGeom prst="rect">
+            <a:avLst/>
+          </a:prstGeom>
+          <a:noFill/>
+          <a:ln/>
+        </p:spPr>
+        <p:txBody>
+          <a:bodyPr wrap="square" lIns="0" tIns="0" rIns="0" bIns="0" rtlCol="0" anchor="ctr"/>
+          <a:lstStyle/>
+          <a:p>
+            <a:pPr indent="0" marL="0">
+              <a:buNone/>
+            </a:pPr>
+            <a:r>
+              <a:rPr lang="en-US" sz="1000" dirty="0">
+                <a:solidFill>
+                  <a:srgbClr val="1B2430"/>
+                </a:solidFill>
+                <a:latin typeface="Calibri" pitchFamily="34" charset="0"/>
+                <a:ea typeface="Calibri" pitchFamily="34" charset="-122"/>
+                <a:cs typeface="Calibri" pitchFamily="34" charset="-120"/>
+              </a:rPr>
+              <a:t>margin on external flow over 20 business days &lt; 30% of this trader's own 12-month margin on the…</a:t>
+            </a:r>
+            <a:endParaRPr lang="en-US" sz="1000" dirty="0"/>
+          </a:p>
+        </p:txBody>
+      </p:sp>
+      <p:sp>
+        <p:nvSpPr>
+          <p:cNvPr id="61" name="Shape 61"/>
+          <p:cNvSpPr/>
+          <p:nvPr/>
+        </p:nvSpPr>
+        <p:spPr>
+          <a:xfrm>
+            <a:off x="10259568" y="5102352"/>
+            <a:ext cx="1280160" cy="484632"/>
+          </a:xfrm>
+          <a:prstGeom prst="rect">
+            <a:avLst/>
+          </a:prstGeom>
+          <a:noFill/>
+          <a:ln/>
+        </p:spPr>
+        <p:txBody>
+          <a:bodyPr wrap="square" lIns="0" tIns="0" rIns="0" bIns="0" rtlCol="0" anchor="ctr"/>
+          <a:lstStyle/>
+          <a:p>
+            <a:pPr algn="r" indent="0" marL="0">
+              <a:buNone/>
+            </a:pPr>
+            <a:r>
+              <a:rPr lang="en-US" sz="940" i="1" dirty="0">
+                <a:solidFill>
+                  <a:srgbClr val="8A94A6"/>
+                </a:solidFill>
+                <a:latin typeface="Calibri" pitchFamily="34" charset="0"/>
+                <a:ea typeface="Calibri" pitchFamily="34" charset="-122"/>
+                <a:cs typeface="Calibri" pitchFamily="34" charset="-120"/>
+              </a:rPr>
+              <a:t>The trader's own 12-month margin…</a:t>
+            </a:r>
+            <a:endParaRPr lang="en-US" sz="940" dirty="0"/>
+          </a:p>
+        </p:txBody>
+      </p:sp>
+      <p:sp>
+        <p:nvSpPr>
+          <p:cNvPr id="62" name="Shape 62"/>
+          <p:cNvSpPr/>
+          <p:nvPr/>
+        </p:nvSpPr>
+        <p:spPr>
+          <a:xfrm>
+            <a:off x="676656" y="5792724"/>
+            <a:ext cx="603504" cy="214884"/>
+          </a:xfrm>
+          <a:prstGeom prst="roundRect">
+            <a:avLst>
+              <a:gd name="adj" fmla="val 25532"/>
+            </a:avLst>
+          </a:prstGeom>
+          <a:solidFill>
+            <a:srgbClr val="C1121F"/>
+          </a:solidFill>
+          <a:ln w="12700">
+            <a:solidFill>
+              <a:srgbClr val="E09F3E"/>
+            </a:solidFill>
+            <a:prstDash val="solid"/>
+          </a:ln>
+        </p:spPr>
+      </p:sp>
+      <p:sp>
+        <p:nvSpPr>
+          <p:cNvPr id="63" name="Shape 63"/>
+          <p:cNvSpPr/>
+          <p:nvPr/>
+        </p:nvSpPr>
+        <p:spPr>
+          <a:xfrm>
+            <a:off x="676656" y="5792724"/>
+            <a:ext cx="603504" cy="214884"/>
+          </a:xfrm>
+          <a:prstGeom prst="rect">
+            <a:avLst/>
+          </a:prstGeom>
+          <a:noFill/>
+          <a:ln/>
+        </p:spPr>
+        <p:txBody>
+          <a:bodyPr wrap="square" lIns="0" tIns="0" rIns="0" bIns="0" rtlCol="0" anchor="ctr"/>
+          <a:lstStyle/>
+          <a:p>
+            <a:pPr algn="ctr" indent="0" marL="0">
+              <a:buNone/>
+            </a:pPr>
+            <a:r>
+              <a:rPr lang="en-US" sz="950" b="1" dirty="0">
+                <a:solidFill>
+                  <a:srgbClr val="FFFFFF"/>
+                </a:solidFill>
+                <a:latin typeface="Courier New" pitchFamily="34" charset="0"/>
+                <a:ea typeface="Courier New" pitchFamily="34" charset="-122"/>
+                <a:cs typeface="Courier New" pitchFamily="34" charset="-120"/>
+              </a:rPr>
+              <a:t>TS-58</a:t>
+            </a:r>
+            <a:endParaRPr lang="en-US" sz="950" dirty="0"/>
+          </a:p>
+        </p:txBody>
+      </p:sp>
+      <p:sp>
+        <p:nvSpPr>
+          <p:cNvPr id="64" name="Shape 64"/>
+          <p:cNvSpPr/>
+          <p:nvPr/>
+        </p:nvSpPr>
+        <p:spPr>
+          <a:xfrm>
+            <a:off x="1408176" y="5660136"/>
+            <a:ext cx="3794760" cy="484632"/>
+          </a:xfrm>
+          <a:prstGeom prst="rect">
+            <a:avLst/>
+          </a:prstGeom>
+          <a:noFill/>
+          <a:ln/>
+        </p:spPr>
+        <p:txBody>
+          <a:bodyPr wrap="square" lIns="0" tIns="0" rIns="0" bIns="0" rtlCol="0" anchor="ctr"/>
+          <a:lstStyle/>
+          <a:p>
+            <a:pPr indent="0" marL="0">
+              <a:buNone/>
+            </a:pPr>
+            <a:r>
+              <a:rPr lang="en-US" sz="1200" b="1" dirty="0">
+                <a:solidFill>
+                  <a:srgbClr val="14213D"/>
+                </a:solidFill>
+                <a:latin typeface="Calibri" pitchFamily="34" charset="0"/>
+                <a:ea typeface="Calibri" pitchFamily="34" charset="-122"/>
+                <a:cs typeface="Calibri" pitchFamily="34" charset="-120"/>
+              </a:rPr>
+              <a:t>Trading losses recovered through client mark-up</a:t>
+            </a:r>
+            <a:endParaRPr lang="en-US" sz="1200" dirty="0"/>
+          </a:p>
+        </p:txBody>
+      </p:sp>
+      <p:sp>
+        <p:nvSpPr>
+          <p:cNvPr id="65" name="Shape 65"/>
+          <p:cNvSpPr/>
+          <p:nvPr/>
+        </p:nvSpPr>
+        <p:spPr>
+          <a:xfrm>
+            <a:off x="5276088" y="5660136"/>
+            <a:ext cx="4892040" cy="484632"/>
+          </a:xfrm>
+          <a:prstGeom prst="rect">
+            <a:avLst/>
+          </a:prstGeom>
+          <a:noFill/>
+          <a:ln/>
+        </p:spPr>
+        <p:txBody>
+          <a:bodyPr wrap="square" lIns="0" tIns="0" rIns="0" bIns="0" rtlCol="0" anchor="ctr"/>
+          <a:lstStyle/>
+          <a:p>
+            <a:pPr indent="0" marL="0">
+              <a:buNone/>
+            </a:pPr>
+            <a:r>
+              <a:rPr lang="en-US" sz="1000" dirty="0">
+                <a:solidFill>
+                  <a:srgbClr val="1B2430"/>
+                </a:solidFill>
+                <a:latin typeface="Calibri" pitchFamily="34" charset="0"/>
+                <a:ea typeface="Calibri" pitchFamily="34" charset="-122"/>
+                <a:cs typeface="Calibri" pitchFamily="34" charset="-120"/>
+              </a:rPr>
+              <a:t>risk loss on a day &gt; 2× this trader's own daily risk-result swing, followed the same day by…</a:t>
+            </a:r>
+            <a:endParaRPr lang="en-US" sz="1000" dirty="0"/>
+          </a:p>
+        </p:txBody>
+      </p:sp>
+      <p:sp>
+        <p:nvSpPr>
+          <p:cNvPr id="66" name="Shape 66"/>
+          <p:cNvSpPr/>
+          <p:nvPr/>
+        </p:nvSpPr>
+        <p:spPr>
+          <a:xfrm>
+            <a:off x="10259568" y="5660136"/>
+            <a:ext cx="1280160" cy="484632"/>
+          </a:xfrm>
+          <a:prstGeom prst="rect">
+            <a:avLst/>
+          </a:prstGeom>
+          <a:noFill/>
+          <a:ln/>
+        </p:spPr>
+        <p:txBody>
+          <a:bodyPr wrap="square" lIns="0" tIns="0" rIns="0" bIns="0" rtlCol="0" anchor="ctr"/>
+          <a:lstStyle/>
+          <a:p>
+            <a:pPr algn="r" indent="0" marL="0">
+              <a:buNone/>
+            </a:pPr>
+            <a:r>
+              <a:rPr lang="en-US" sz="940" i="1" dirty="0">
+                <a:solidFill>
+                  <a:srgbClr val="8A94A6"/>
+                </a:solidFill>
+                <a:latin typeface="Calibri" pitchFamily="34" charset="0"/>
+                <a:ea typeface="Calibri" pitchFamily="34" charset="-122"/>
+                <a:cs typeface="Calibri" pitchFamily="34" charset="-120"/>
+              </a:rPr>
+              <a:t>The trader's own daily…</a:t>
+            </a:r>
+            <a:endParaRPr lang="en-US" sz="940" dirty="0"/>
           </a:p>
         </p:txBody>
       </p:sp>
@@ -10090,7 +11383,7 @@
                 <a:ea typeface="Calibri" pitchFamily="34" charset="-122"/>
                 <a:cs typeface="Calibri" pitchFamily="34" charset="-120"/>
               </a:rPr>
-              <a:t>The fifty rules read 60 distinct data elements from 31 source systems. A rule reads between six and ten fields, and almost every one needs four or more systems to agree with each other.</a:t>
+              <a:t>The fifty-eight rules read 62 distinct data elements from 32 source systems. A rule reads between five and ten fields, and almost every one needs four or more systems to agree with each other.</a:t>
             </a:r>
             <a:endParaRPr lang="en-US" sz="1350" dirty="0"/>
           </a:p>
@@ -10275,7 +11568,7 @@
                 <a:ea typeface="Calibri" pitchFamily="34" charset="-122"/>
                 <a:cs typeface="Calibri" pitchFamily="34" charset="-120"/>
               </a:rPr>
-              <a:t>Sixteen of the fifty — every market-conduct test in the catalogue. Capture time will not substitute: the gap between the two is itself what several of them measure.</a:t>
+              <a:t>Eighteen of the fifty-eight — every market-conduct test in the catalogue. Capture time will not substitute: the gap between the two is itself what several of them measure.</a:t>
             </a:r>
             <a:endParaRPr lang="en-US" sz="1100" dirty="0"/>
           </a:p>
@@ -10659,7 +11952,7 @@
                 <a:ea typeface="Calibri" pitchFamily="34" charset="-122"/>
                 <a:cs typeface="Calibri" pitchFamily="34" charset="-120"/>
               </a:rPr>
-              <a:t>These rules read bookings, prices, timing, limits and settlement. They do not read email, chat or voice, and they never establish intent.</a:t>
+              <a:t>These rules read bookings, prices, revenue, timing, limits and settlement. They do not read email, chat or voice, and they never establish intent.</a:t>
             </a:r>
             <a:endParaRPr lang="en-US" sz="1250" dirty="0"/>
           </a:p>
@@ -11870,7 +13163,7 @@
                 <a:ea typeface="Cambria" pitchFamily="34" charset="-122"/>
                 <a:cs typeface="Cambria" pitchFamily="34" charset="-120"/>
               </a:rPr>
-              <a:t>50</a:t>
+              <a:t>58</a:t>
             </a:r>
             <a:endParaRPr lang="en-US" sz="3200" dirty="0"/>
           </a:p>
@@ -11975,7 +13268,7 @@
                 <a:ea typeface="Cambria" pitchFamily="34" charset="-122"/>
                 <a:cs typeface="Cambria" pitchFamily="34" charset="-120"/>
               </a:rPr>
-              <a:t>31</a:t>
+              <a:t>32</a:t>
             </a:r>
             <a:endParaRPr lang="en-US" sz="3200" dirty="0"/>
           </a:p>
@@ -12080,7 +13373,7 @@
                 <a:ea typeface="Cambria" pitchFamily="34" charset="-122"/>
                 <a:cs typeface="Cambria" pitchFamily="34" charset="-120"/>
               </a:rPr>
-              <a:t>14</a:t>
+              <a:t>15</a:t>
             </a:r>
             <a:endParaRPr lang="en-US" sz="3200" dirty="0"/>
           </a:p>
@@ -12185,7 +13478,7 @@
                 <a:ea typeface="Cambria" pitchFamily="34" charset="-122"/>
                 <a:cs typeface="Cambria" pitchFamily="34" charset="-120"/>
               </a:rPr>
-              <a:t>7.8</a:t>
+              <a:t>7.6</a:t>
             </a:r>
             <a:endParaRPr lang="en-US" sz="3200" dirty="0"/>
           </a:p>
@@ -12480,7 +13773,7 @@
                 <a:ea typeface="Calibri" pitchFamily="34" charset="-122"/>
                 <a:cs typeface="Calibri" pitchFamily="34" charset="-120"/>
               </a:rPr>
-              <a:t>Sixteen rules cannot run on capture time, including every market-conduct typology. A trade-capture and venue-feed commitment, not a surveillance one.</a:t>
+              <a:t>Eighteen rules cannot run on capture time, including every market-conduct typology. A trade-capture and venue-feed commitment, not a surveillance one.</a:t>
             </a:r>
             <a:endParaRPr lang="en-US" sz="1150" dirty="0"/>
           </a:p>
@@ -12846,7 +14139,7 @@
                 <a:ea typeface="Cambria" pitchFamily="34" charset="-122"/>
                 <a:cs typeface="Cambria" pitchFamily="34" charset="-120"/>
               </a:rPr>
-              <a:t>Fifty rules, one principle</a:t>
+              <a:t>Fifty-eight rules, one principle</a:t>
             </a:r>
             <a:endParaRPr lang="en-US" sz="4000" dirty="0"/>
           </a:p>
@@ -13178,7 +14471,7 @@
                 <a:ea typeface="Calibri" pitchFamily="34" charset="-122"/>
                 <a:cs typeface="Calibri" pitchFamily="34" charset="-120"/>
               </a:rPr>
-              <a:t>This is the single design decision behind all fifty rules, and the one worth arguing about before any individual threshold.</a:t>
+              <a:t>This is the single design decision behind all fifty-eight rules, and the one worth arguing about before any individual threshold.</a:t>
             </a:r>
             <a:endParaRPr lang="en-US" sz="1450" dirty="0"/>
           </a:p>
@@ -13671,7 +14964,7 @@
                 <a:ea typeface="Cambria" pitchFamily="34" charset="-122"/>
                 <a:cs typeface="Cambria" pitchFamily="34" charset="-120"/>
               </a:rPr>
-              <a:t>Nine categories, fifty typologies</a:t>
+              <a:t>Nine categories, fifty-eight typologies</a:t>
             </a:r>
             <a:endParaRPr lang="en-US" sz="3000" dirty="0"/>
           </a:p>
@@ -14438,7 +15731,7 @@
                 <a:ea typeface="Cambria" pitchFamily="34" charset="-122"/>
                 <a:cs typeface="Cambria" pitchFamily="34" charset="-120"/>
               </a:rPr>
-              <a:t>7</a:t>
+              <a:t>10</a:t>
             </a:r>
             <a:endParaRPr lang="en-US" sz="2000" dirty="0"/>
           </a:p>
@@ -14607,7 +15900,7 @@
                 <a:ea typeface="Cambria" pitchFamily="34" charset="-122"/>
                 <a:cs typeface="Cambria" pitchFamily="34" charset="-120"/>
               </a:rPr>
-              <a:t>3</a:t>
+              <a:t>8</a:t>
             </a:r>
             <a:endParaRPr lang="en-US" sz="2000" dirty="0"/>
           </a:p>
@@ -15512,7 +16805,7 @@
                 <a:ea typeface="Cambria" pitchFamily="34" charset="-122"/>
                 <a:cs typeface="Cambria" pitchFamily="34" charset="-120"/>
               </a:rPr>
-              <a:t>14 rules</a:t>
+              <a:t>15 rules</a:t>
             </a:r>
             <a:endParaRPr lang="en-US" sz="1600" dirty="0"/>
           </a:p>
@@ -15722,7 +17015,7 @@
                 <a:ea typeface="Cambria" pitchFamily="34" charset="-122"/>
                 <a:cs typeface="Cambria" pitchFamily="34" charset="-120"/>
               </a:rPr>
-              <a:t>23 rules</a:t>
+              <a:t>27 rules</a:t>
             </a:r>
             <a:endParaRPr lang="en-US" sz="1600" dirty="0"/>
           </a:p>
@@ -15932,7 +17225,7 @@
                 <a:ea typeface="Cambria" pitchFamily="34" charset="-122"/>
                 <a:cs typeface="Cambria" pitchFamily="34" charset="-120"/>
               </a:rPr>
-              <a:t>13 rules</a:t>
+              <a:t>16 rules</a:t>
             </a:r>
             <a:endParaRPr lang="en-US" sz="1600" dirty="0"/>
           </a:p>
@@ -22762,7 +24055,7 @@
                 <a:ea typeface="Calibri" pitchFamily="34" charset="-122"/>
                 <a:cs typeface="Calibri" pitchFamily="34" charset="-120"/>
               </a:rPr>
-              <a:t>TYPOLOGIES  ·  7 RULES</a:t>
+              <a:t>TYPOLOGIES  ·  10 RULES</a:t>
             </a:r>
             <a:endParaRPr lang="en-US" sz="1100" dirty="0"/>
           </a:p>
@@ -22840,7 +24133,7 @@
                 <a:ea typeface="Calibri" pitchFamily="34" charset="-122"/>
                 <a:cs typeface="Calibri" pitchFamily="34" charset="-120"/>
               </a:rPr>
-              <a:t>Seven tests on whether reported profit is earned profit.</a:t>
+              <a:t>Ten tests on whether reported profit is earned profit.</a:t>
             </a:r>
             <a:endParaRPr lang="en-US" sz="1350" dirty="0"/>
           </a:p>
@@ -22848,14 +24141,14 @@
       </p:sp>
       <p:sp>
         <p:nvSpPr>
-          <p:cNvPr id="5" name="Shape 3"/>
+          <p:cNvPr id="45" name="Shape 45"/>
           <p:cNvSpPr/>
           <p:nvPr/>
         </p:nvSpPr>
         <p:spPr>
           <a:xfrm>
             <a:off x="566928" y="1737360"/>
-            <a:ext cx="10881360" cy="530352"/>
+            <a:ext cx="10881360" cy="409651"/>
           </a:xfrm>
           <a:prstGeom prst="rect">
             <a:avLst/>
@@ -22873,13 +24166,13 @@
       </p:sp>
       <p:sp>
         <p:nvSpPr>
-          <p:cNvPr id="6" name="Shape 4"/>
-          <p:cNvSpPr/>
-          <p:nvPr/>
-        </p:nvSpPr>
-        <p:spPr>
-          <a:xfrm>
-            <a:off x="676656" y="1892808"/>
+          <p:cNvPr id="46" name="Shape 46"/>
+          <p:cNvSpPr/>
+          <p:nvPr/>
+        </p:nvSpPr>
+        <p:spPr>
+          <a:xfrm>
+            <a:off x="676656" y="1832457"/>
             <a:ext cx="603504" cy="214884"/>
           </a:xfrm>
           <a:prstGeom prst="roundRect">
@@ -22892,7 +24185,7 @@
           </a:solidFill>
           <a:ln w="12700">
             <a:solidFill>
-              <a:srgbClr val="C1121F"/>
+              <a:srgbClr val="E09F3E"/>
             </a:solidFill>
             <a:prstDash val="solid"/>
           </a:ln>
@@ -22900,13 +24193,13 @@
       </p:sp>
       <p:sp>
         <p:nvSpPr>
-          <p:cNvPr id="7" name="Text 5"/>
-          <p:cNvSpPr/>
-          <p:nvPr/>
-        </p:nvSpPr>
-        <p:spPr>
-          <a:xfrm>
-            <a:off x="676656" y="1892808"/>
+          <p:cNvPr id="47" name="Shape 47"/>
+          <p:cNvSpPr/>
+          <p:nvPr/>
+        </p:nvSpPr>
+        <p:spPr>
+          <a:xfrm>
+            <a:off x="676656" y="1832457"/>
             <a:ext cx="603504" cy="214884"/>
           </a:xfrm>
           <a:prstGeom prst="rect">
@@ -22939,30 +24232,30 @@
       </p:sp>
       <p:sp>
         <p:nvSpPr>
-          <p:cNvPr id="8" name="Text 6"/>
+          <p:cNvPr id="48" name="Shape 48"/>
           <p:cNvSpPr/>
           <p:nvPr/>
         </p:nvSpPr>
         <p:spPr>
           <a:xfrm>
             <a:off x="1408176" y="1755648"/>
-            <a:ext cx="3794760" cy="493776"/>
-          </a:xfrm>
-          <a:prstGeom prst="rect">
-            <a:avLst/>
-          </a:prstGeom>
-          <a:noFill/>
-          <a:ln/>
-        </p:spPr>
-        <p:txBody>
-          <a:bodyPr wrap="square" lIns="0" tIns="0" rIns="0" bIns="0" rtlCol="0" anchor="ctr"/>
-          <a:lstStyle/>
-          <a:p>
-            <a:pPr indent="0" marL="0">
-              <a:buNone/>
-            </a:pPr>
-            <a:r>
-              <a:rPr lang="en-US" sz="1280" b="1" dirty="0">
+            <a:ext cx="3794760" cy="373075"/>
+          </a:xfrm>
+          <a:prstGeom prst="rect">
+            <a:avLst/>
+          </a:prstGeom>
+          <a:noFill/>
+          <a:ln/>
+        </p:spPr>
+        <p:txBody>
+          <a:bodyPr wrap="square" lIns="0" tIns="0" rIns="0" bIns="0" rtlCol="0" anchor="ctr"/>
+          <a:lstStyle/>
+          <a:p>
+            <a:pPr indent="0" marL="0">
+              <a:buNone/>
+            </a:pPr>
+            <a:r>
+              <a:rPr lang="en-US" sz="1200" b="1" dirty="0">
                 <a:solidFill>
                   <a:srgbClr val="14213D"/>
                 </a:solidFill>
@@ -22972,36 +24265,36 @@
               </a:rPr>
               <a:t>Period-end mark manipulation</a:t>
             </a:r>
-            <a:endParaRPr lang="en-US" sz="1280" dirty="0"/>
-          </a:p>
-        </p:txBody>
-      </p:sp>
-      <p:sp>
-        <p:nvSpPr>
-          <p:cNvPr id="9" name="Text 7"/>
+            <a:endParaRPr lang="en-US" sz="1200" dirty="0"/>
+          </a:p>
+        </p:txBody>
+      </p:sp>
+      <p:sp>
+        <p:nvSpPr>
+          <p:cNvPr id="49" name="Shape 49"/>
           <p:cNvSpPr/>
           <p:nvPr/>
         </p:nvSpPr>
         <p:spPr>
           <a:xfrm>
             <a:off x="5276088" y="1755648"/>
-            <a:ext cx="4892040" cy="493776"/>
-          </a:xfrm>
-          <a:prstGeom prst="rect">
-            <a:avLst/>
-          </a:prstGeom>
-          <a:noFill/>
-          <a:ln/>
-        </p:spPr>
-        <p:txBody>
-          <a:bodyPr wrap="square" lIns="0" tIns="0" rIns="0" bIns="0" rtlCol="0" anchor="ctr"/>
-          <a:lstStyle/>
-          <a:p>
-            <a:pPr indent="0" marL="0">
-              <a:buNone/>
-            </a:pPr>
-            <a:r>
-              <a:rPr lang="en-US" sz="1080" dirty="0">
+            <a:ext cx="4892040" cy="373075"/>
+          </a:xfrm>
+          <a:prstGeom prst="rect">
+            <a:avLst/>
+          </a:prstGeom>
+          <a:noFill/>
+          <a:ln/>
+        </p:spPr>
+        <p:txBody>
+          <a:bodyPr wrap="square" lIns="0" tIns="0" rIns="0" bIns="0" rtlCol="0" anchor="ctr"/>
+          <a:lstStyle/>
+          <a:p>
+            <a:pPr indent="0" marL="0">
+              <a:buNone/>
+            </a:pPr>
+            <a:r>
+              <a:rPr lang="en-US" sz="1000" dirty="0">
                 <a:solidFill>
                   <a:srgbClr val="1B2430"/>
                 </a:solidFill>
@@ -23009,22 +24302,22 @@
                 <a:ea typeface="Calibri" pitchFamily="34" charset="-122"/>
                 <a:cs typeface="Calibri" pitchFamily="34" charset="-120"/>
               </a:rPr>
-              <a:t>≥2 trades &gt;20 bps off mid on a month-end valuation date by the same trader, with reversal within 3 business days</a:t>
-            </a:r>
-            <a:endParaRPr lang="en-US" sz="1080" dirty="0"/>
-          </a:p>
-        </p:txBody>
-      </p:sp>
-      <p:sp>
-        <p:nvSpPr>
-          <p:cNvPr id="10" name="Text 8"/>
+              <a:t>≥2 trades &gt;20 bps off mid on a month-end valuation date by the same trader, with reversal…</a:t>
+            </a:r>
+            <a:endParaRPr lang="en-US" sz="1000" dirty="0"/>
+          </a:p>
+        </p:txBody>
+      </p:sp>
+      <p:sp>
+        <p:nvSpPr>
+          <p:cNvPr id="50" name="Shape 50"/>
           <p:cNvSpPr/>
           <p:nvPr/>
         </p:nvSpPr>
         <p:spPr>
           <a:xfrm>
             <a:off x="10259568" y="1755648"/>
-            <a:ext cx="1280160" cy="493776"/>
+            <a:ext cx="1280160" cy="373075"/>
           </a:xfrm>
           <a:prstGeom prst="rect">
             <a:avLst/>
@@ -23040,7 +24333,7 @@
               <a:buNone/>
             </a:pPr>
             <a:r>
-              <a:rPr lang="en-US" sz="1020" i="1" dirty="0">
+              <a:rPr lang="en-US" sz="940" i="1" dirty="0">
                 <a:solidFill>
                   <a:srgbClr val="8A94A6"/>
                 </a:solidFill>
@@ -23050,19 +24343,19 @@
               </a:rPr>
               <a:t>The trader's own book across the…</a:t>
             </a:r>
-            <a:endParaRPr lang="en-US" sz="1020" dirty="0"/>
-          </a:p>
-        </p:txBody>
-      </p:sp>
-      <p:sp>
-        <p:nvSpPr>
-          <p:cNvPr id="11" name="Shape 9"/>
-          <p:cNvSpPr/>
-          <p:nvPr/>
-        </p:nvSpPr>
-        <p:spPr>
-          <a:xfrm>
-            <a:off x="676656" y="2459736"/>
+            <a:endParaRPr lang="en-US" sz="940" dirty="0"/>
+          </a:p>
+        </p:txBody>
+      </p:sp>
+      <p:sp>
+        <p:nvSpPr>
+          <p:cNvPr id="51" name="Shape 51"/>
+          <p:cNvSpPr/>
+          <p:nvPr/>
+        </p:nvSpPr>
+        <p:spPr>
+          <a:xfrm>
+            <a:off x="676656" y="2278684"/>
             <a:ext cx="603504" cy="214884"/>
           </a:xfrm>
           <a:prstGeom prst="roundRect">
@@ -23083,13 +24376,13 @@
       </p:sp>
       <p:sp>
         <p:nvSpPr>
-          <p:cNvPr id="12" name="Text 10"/>
-          <p:cNvSpPr/>
-          <p:nvPr/>
-        </p:nvSpPr>
-        <p:spPr>
-          <a:xfrm>
-            <a:off x="676656" y="2459736"/>
+          <p:cNvPr id="52" name="Shape 52"/>
+          <p:cNvSpPr/>
+          <p:nvPr/>
+        </p:nvSpPr>
+        <p:spPr>
+          <a:xfrm>
+            <a:off x="676656" y="2278684"/>
             <a:ext cx="603504" cy="214884"/>
           </a:xfrm>
           <a:prstGeom prst="rect">
@@ -23122,30 +24415,30 @@
       </p:sp>
       <p:sp>
         <p:nvSpPr>
-          <p:cNvPr id="13" name="Text 11"/>
-          <p:cNvSpPr/>
-          <p:nvPr/>
-        </p:nvSpPr>
-        <p:spPr>
-          <a:xfrm>
-            <a:off x="1408176" y="2322576"/>
-            <a:ext cx="3794760" cy="493776"/>
-          </a:xfrm>
-          <a:prstGeom prst="rect">
-            <a:avLst/>
-          </a:prstGeom>
-          <a:noFill/>
-          <a:ln/>
-        </p:spPr>
-        <p:txBody>
-          <a:bodyPr wrap="square" lIns="0" tIns="0" rIns="0" bIns="0" rtlCol="0" anchor="ctr"/>
-          <a:lstStyle/>
-          <a:p>
-            <a:pPr indent="0" marL="0">
-              <a:buNone/>
-            </a:pPr>
-            <a:r>
-              <a:rPr lang="en-US" sz="1280" b="1" dirty="0">
+          <p:cNvPr id="53" name="Shape 53"/>
+          <p:cNvSpPr/>
+          <p:nvPr/>
+        </p:nvSpPr>
+        <p:spPr>
+          <a:xfrm>
+            <a:off x="1408176" y="2201875"/>
+            <a:ext cx="3794760" cy="373075"/>
+          </a:xfrm>
+          <a:prstGeom prst="rect">
+            <a:avLst/>
+          </a:prstGeom>
+          <a:noFill/>
+          <a:ln/>
+        </p:spPr>
+        <p:txBody>
+          <a:bodyPr wrap="square" lIns="0" tIns="0" rIns="0" bIns="0" rtlCol="0" anchor="ctr"/>
+          <a:lstStyle/>
+          <a:p>
+            <a:pPr indent="0" marL="0">
+              <a:buNone/>
+            </a:pPr>
+            <a:r>
+              <a:rPr lang="en-US" sz="1200" b="1" dirty="0">
                 <a:solidFill>
                   <a:srgbClr val="14213D"/>
                 </a:solidFill>
@@ -23155,36 +24448,36 @@
               </a:rPr>
               <a:t>P&amp;L outlier versus own volatility</a:t>
             </a:r>
-            <a:endParaRPr lang="en-US" sz="1280" dirty="0"/>
-          </a:p>
-        </p:txBody>
-      </p:sp>
-      <p:sp>
-        <p:nvSpPr>
-          <p:cNvPr id="14" name="Text 12"/>
-          <p:cNvSpPr/>
-          <p:nvPr/>
-        </p:nvSpPr>
-        <p:spPr>
-          <a:xfrm>
-            <a:off x="5276088" y="2322576"/>
-            <a:ext cx="4892040" cy="493776"/>
-          </a:xfrm>
-          <a:prstGeom prst="rect">
-            <a:avLst/>
-          </a:prstGeom>
-          <a:noFill/>
-          <a:ln/>
-        </p:spPr>
-        <p:txBody>
-          <a:bodyPr wrap="square" lIns="0" tIns="0" rIns="0" bIns="0" rtlCol="0" anchor="ctr"/>
-          <a:lstStyle/>
-          <a:p>
-            <a:pPr indent="0" marL="0">
-              <a:buNone/>
-            </a:pPr>
-            <a:r>
-              <a:rPr lang="en-US" sz="1080" dirty="0">
+            <a:endParaRPr lang="en-US" sz="1200" dirty="0"/>
+          </a:p>
+        </p:txBody>
+      </p:sp>
+      <p:sp>
+        <p:nvSpPr>
+          <p:cNvPr id="54" name="Shape 54"/>
+          <p:cNvSpPr/>
+          <p:nvPr/>
+        </p:nvSpPr>
+        <p:spPr>
+          <a:xfrm>
+            <a:off x="5276088" y="2201875"/>
+            <a:ext cx="4892040" cy="373075"/>
+          </a:xfrm>
+          <a:prstGeom prst="rect">
+            <a:avLst/>
+          </a:prstGeom>
+          <a:noFill/>
+          <a:ln/>
+        </p:spPr>
+        <p:txBody>
+          <a:bodyPr wrap="square" lIns="0" tIns="0" rIns="0" bIns="0" rtlCol="0" anchor="ctr"/>
+          <a:lstStyle/>
+          <a:p>
+            <a:pPr indent="0" marL="0">
+              <a:buNone/>
+            </a:pPr>
+            <a:r>
+              <a:rPr lang="en-US" sz="1000" dirty="0">
                 <a:solidFill>
                   <a:srgbClr val="1B2430"/>
                 </a:solidFill>
@@ -23194,20 +24487,20 @@
               </a:rPr>
               <a:t>|daily P&amp;L| z-score &gt; 3.0 against this trader's own trailing 60-day distribution</a:t>
             </a:r>
-            <a:endParaRPr lang="en-US" sz="1080" dirty="0"/>
-          </a:p>
-        </p:txBody>
-      </p:sp>
-      <p:sp>
-        <p:nvSpPr>
-          <p:cNvPr id="15" name="Text 13"/>
-          <p:cNvSpPr/>
-          <p:nvPr/>
-        </p:nvSpPr>
-        <p:spPr>
-          <a:xfrm>
-            <a:off x="10259568" y="2322576"/>
-            <a:ext cx="1280160" cy="493776"/>
+            <a:endParaRPr lang="en-US" sz="1000" dirty="0"/>
+          </a:p>
+        </p:txBody>
+      </p:sp>
+      <p:sp>
+        <p:nvSpPr>
+          <p:cNvPr id="55" name="Shape 55"/>
+          <p:cNvSpPr/>
+          <p:nvPr/>
+        </p:nvSpPr>
+        <p:spPr>
+          <a:xfrm>
+            <a:off x="10259568" y="2201875"/>
+            <a:ext cx="1280160" cy="373075"/>
           </a:xfrm>
           <a:prstGeom prst="rect">
             <a:avLst/>
@@ -23223,7 +24516,7 @@
               <a:buNone/>
             </a:pPr>
             <a:r>
-              <a:rPr lang="en-US" sz="1020" i="1" dirty="0">
+              <a:rPr lang="en-US" sz="940" i="1" dirty="0">
                 <a:solidFill>
                   <a:srgbClr val="8A94A6"/>
                 </a:solidFill>
@@ -23233,20 +24526,20 @@
               </a:rPr>
               <a:t>The trader's own trailing 60-day…</a:t>
             </a:r>
-            <a:endParaRPr lang="en-US" sz="1020" dirty="0"/>
-          </a:p>
-        </p:txBody>
-      </p:sp>
-      <p:sp>
-        <p:nvSpPr>
-          <p:cNvPr id="16" name="Shape 14"/>
-          <p:cNvSpPr/>
-          <p:nvPr/>
-        </p:nvSpPr>
-        <p:spPr>
-          <a:xfrm>
-            <a:off x="566928" y="2871216"/>
-            <a:ext cx="10881360" cy="530352"/>
+            <a:endParaRPr lang="en-US" sz="940" dirty="0"/>
+          </a:p>
+        </p:txBody>
+      </p:sp>
+      <p:sp>
+        <p:nvSpPr>
+          <p:cNvPr id="56" name="Shape 56"/>
+          <p:cNvSpPr/>
+          <p:nvPr/>
+        </p:nvSpPr>
+        <p:spPr>
+          <a:xfrm>
+            <a:off x="566928" y="2629814"/>
+            <a:ext cx="10881360" cy="409651"/>
           </a:xfrm>
           <a:prstGeom prst="rect">
             <a:avLst/>
@@ -23264,13 +24557,13 @@
       </p:sp>
       <p:sp>
         <p:nvSpPr>
-          <p:cNvPr id="17" name="Shape 15"/>
-          <p:cNvSpPr/>
-          <p:nvPr/>
-        </p:nvSpPr>
-        <p:spPr>
-          <a:xfrm>
-            <a:off x="676656" y="3026664"/>
+          <p:cNvPr id="57" name="Shape 57"/>
+          <p:cNvSpPr/>
+          <p:nvPr/>
+        </p:nvSpPr>
+        <p:spPr>
+          <a:xfrm>
+            <a:off x="676656" y="2724911"/>
             <a:ext cx="603504" cy="214884"/>
           </a:xfrm>
           <a:prstGeom prst="roundRect">
@@ -23283,7 +24576,7 @@
           </a:solidFill>
           <a:ln w="12700">
             <a:solidFill>
-              <a:srgbClr val="C1121F"/>
+              <a:srgbClr val="E09F3E"/>
             </a:solidFill>
             <a:prstDash val="solid"/>
           </a:ln>
@@ -23291,13 +24584,13 @@
       </p:sp>
       <p:sp>
         <p:nvSpPr>
-          <p:cNvPr id="18" name="Text 16"/>
-          <p:cNvSpPr/>
-          <p:nvPr/>
-        </p:nvSpPr>
-        <p:spPr>
-          <a:xfrm>
-            <a:off x="676656" y="3026664"/>
+          <p:cNvPr id="58" name="Shape 58"/>
+          <p:cNvSpPr/>
+          <p:nvPr/>
+        </p:nvSpPr>
+        <p:spPr>
+          <a:xfrm>
+            <a:off x="676656" y="2724911"/>
             <a:ext cx="603504" cy="214884"/>
           </a:xfrm>
           <a:prstGeom prst="rect">
@@ -23330,30 +24623,30 @@
       </p:sp>
       <p:sp>
         <p:nvSpPr>
-          <p:cNvPr id="19" name="Text 17"/>
-          <p:cNvSpPr/>
-          <p:nvPr/>
-        </p:nvSpPr>
-        <p:spPr>
-          <a:xfrm>
-            <a:off x="1408176" y="2889504"/>
-            <a:ext cx="3794760" cy="493776"/>
-          </a:xfrm>
-          <a:prstGeom prst="rect">
-            <a:avLst/>
-          </a:prstGeom>
-          <a:noFill/>
-          <a:ln/>
-        </p:spPr>
-        <p:txBody>
-          <a:bodyPr wrap="square" lIns="0" tIns="0" rIns="0" bIns="0" rtlCol="0" anchor="ctr"/>
-          <a:lstStyle/>
-          <a:p>
-            <a:pPr indent="0" marL="0">
-              <a:buNone/>
-            </a:pPr>
-            <a:r>
-              <a:rPr lang="en-US" sz="1280" b="1" dirty="0">
+          <p:cNvPr id="59" name="Shape 59"/>
+          <p:cNvSpPr/>
+          <p:nvPr/>
+        </p:nvSpPr>
+        <p:spPr>
+          <a:xfrm>
+            <a:off x="1408176" y="2648102"/>
+            <a:ext cx="3794760" cy="373075"/>
+          </a:xfrm>
+          <a:prstGeom prst="rect">
+            <a:avLst/>
+          </a:prstGeom>
+          <a:noFill/>
+          <a:ln/>
+        </p:spPr>
+        <p:txBody>
+          <a:bodyPr wrap="square" lIns="0" tIns="0" rIns="0" bIns="0" rtlCol="0" anchor="ctr"/>
+          <a:lstStyle/>
+          <a:p>
+            <a:pPr indent="0" marL="0">
+              <a:buNone/>
+            </a:pPr>
+            <a:r>
+              <a:rPr lang="en-US" sz="1200" b="1" dirty="0">
                 <a:solidFill>
                   <a:srgbClr val="14213D"/>
                 </a:solidFill>
@@ -23363,36 +24656,36 @@
               </a:rPr>
               <a:t>Loss parking via internal book transfer</a:t>
             </a:r>
-            <a:endParaRPr lang="en-US" sz="1280" dirty="0"/>
-          </a:p>
-        </p:txBody>
-      </p:sp>
-      <p:sp>
-        <p:nvSpPr>
-          <p:cNvPr id="20" name="Text 18"/>
-          <p:cNvSpPr/>
-          <p:nvPr/>
-        </p:nvSpPr>
-        <p:spPr>
-          <a:xfrm>
-            <a:off x="5276088" y="2889504"/>
-            <a:ext cx="4892040" cy="493776"/>
-          </a:xfrm>
-          <a:prstGeom prst="rect">
-            <a:avLst/>
-          </a:prstGeom>
-          <a:noFill/>
-          <a:ln/>
-        </p:spPr>
-        <p:txBody>
-          <a:bodyPr wrap="square" lIns="0" tIns="0" rIns="0" bIns="0" rtlCol="0" anchor="ctr"/>
-          <a:lstStyle/>
-          <a:p>
-            <a:pPr indent="0" marL="0">
-              <a:buNone/>
-            </a:pPr>
-            <a:r>
-              <a:rPr lang="en-US" sz="1080" dirty="0">
+            <a:endParaRPr lang="en-US" sz="1200" dirty="0"/>
+          </a:p>
+        </p:txBody>
+      </p:sp>
+      <p:sp>
+        <p:nvSpPr>
+          <p:cNvPr id="60" name="Shape 60"/>
+          <p:cNvSpPr/>
+          <p:nvPr/>
+        </p:nvSpPr>
+        <p:spPr>
+          <a:xfrm>
+            <a:off x="5276088" y="2648102"/>
+            <a:ext cx="4892040" cy="373075"/>
+          </a:xfrm>
+          <a:prstGeom prst="rect">
+            <a:avLst/>
+          </a:prstGeom>
+          <a:noFill/>
+          <a:ln/>
+        </p:spPr>
+        <p:txBody>
+          <a:bodyPr wrap="square" lIns="0" tIns="0" rIns="0" bIns="0" rtlCol="0" anchor="ctr"/>
+          <a:lstStyle/>
+          <a:p>
+            <a:pPr indent="0" marL="0">
+              <a:buNone/>
+            </a:pPr>
+            <a:r>
+              <a:rPr lang="en-US" sz="1000" dirty="0">
                 <a:solidFill>
                   <a:srgbClr val="1B2430"/>
                 </a:solidFill>
@@ -23400,22 +24693,22 @@
                 <a:ea typeface="Calibri" pitchFamily="34" charset="-122"/>
                 <a:cs typeface="Calibri" pitchFamily="34" charset="-120"/>
               </a:rPr>
-              <a:t>internal transfer out of the trader's book within 3 days before period end, reversed within 10 days, same instrument…</a:t>
-            </a:r>
-            <a:endParaRPr lang="en-US" sz="1080" dirty="0"/>
-          </a:p>
-        </p:txBody>
-      </p:sp>
-      <p:sp>
-        <p:nvSpPr>
-          <p:cNvPr id="21" name="Text 19"/>
-          <p:cNvSpPr/>
-          <p:nvPr/>
-        </p:nvSpPr>
-        <p:spPr>
-          <a:xfrm>
-            <a:off x="10259568" y="2889504"/>
-            <a:ext cx="1280160" cy="493776"/>
+              <a:t>internal transfer out of the trader's book within 3 days before period end, reversed within 10…</a:t>
+            </a:r>
+            <a:endParaRPr lang="en-US" sz="1000" dirty="0"/>
+          </a:p>
+        </p:txBody>
+      </p:sp>
+      <p:sp>
+        <p:nvSpPr>
+          <p:cNvPr id="61" name="Shape 61"/>
+          <p:cNvSpPr/>
+          <p:nvPr/>
+        </p:nvSpPr>
+        <p:spPr>
+          <a:xfrm>
+            <a:off x="10259568" y="2648102"/>
+            <a:ext cx="1280160" cy="373075"/>
           </a:xfrm>
           <a:prstGeom prst="rect">
             <a:avLst/>
@@ -23431,7 +24724,7 @@
               <a:buNone/>
             </a:pPr>
             <a:r>
-              <a:rPr lang="en-US" sz="1020" i="1" dirty="0">
+              <a:rPr lang="en-US" sz="940" i="1" dirty="0">
                 <a:solidFill>
                   <a:srgbClr val="8A94A6"/>
                 </a:solidFill>
@@ -23441,19 +24734,19 @@
               </a:rPr>
               <a:t>The trader's own book across the…</a:t>
             </a:r>
-            <a:endParaRPr lang="en-US" sz="1020" dirty="0"/>
-          </a:p>
-        </p:txBody>
-      </p:sp>
-      <p:sp>
-        <p:nvSpPr>
-          <p:cNvPr id="22" name="Shape 20"/>
-          <p:cNvSpPr/>
-          <p:nvPr/>
-        </p:nvSpPr>
-        <p:spPr>
-          <a:xfrm>
-            <a:off x="676656" y="3593592"/>
+            <a:endParaRPr lang="en-US" sz="940" dirty="0"/>
+          </a:p>
+        </p:txBody>
+      </p:sp>
+      <p:sp>
+        <p:nvSpPr>
+          <p:cNvPr id="62" name="Shape 62"/>
+          <p:cNvSpPr/>
+          <p:nvPr/>
+        </p:nvSpPr>
+        <p:spPr>
+          <a:xfrm>
+            <a:off x="676656" y="3171138"/>
             <a:ext cx="603504" cy="214884"/>
           </a:xfrm>
           <a:prstGeom prst="roundRect">
@@ -23474,13 +24767,13 @@
       </p:sp>
       <p:sp>
         <p:nvSpPr>
-          <p:cNvPr id="23" name="Text 21"/>
-          <p:cNvSpPr/>
-          <p:nvPr/>
-        </p:nvSpPr>
-        <p:spPr>
-          <a:xfrm>
-            <a:off x="676656" y="3593592"/>
+          <p:cNvPr id="63" name="Shape 63"/>
+          <p:cNvSpPr/>
+          <p:nvPr/>
+        </p:nvSpPr>
+        <p:spPr>
+          <a:xfrm>
+            <a:off x="676656" y="3171138"/>
             <a:ext cx="603504" cy="214884"/>
           </a:xfrm>
           <a:prstGeom prst="rect">
@@ -23513,30 +24806,30 @@
       </p:sp>
       <p:sp>
         <p:nvSpPr>
-          <p:cNvPr id="24" name="Text 22"/>
-          <p:cNvSpPr/>
-          <p:nvPr/>
-        </p:nvSpPr>
-        <p:spPr>
-          <a:xfrm>
-            <a:off x="1408176" y="3456432"/>
-            <a:ext cx="3794760" cy="493776"/>
-          </a:xfrm>
-          <a:prstGeom prst="rect">
-            <a:avLst/>
-          </a:prstGeom>
-          <a:noFill/>
-          <a:ln/>
-        </p:spPr>
-        <p:txBody>
-          <a:bodyPr wrap="square" lIns="0" tIns="0" rIns="0" bIns="0" rtlCol="0" anchor="ctr"/>
-          <a:lstStyle/>
-          <a:p>
-            <a:pPr indent="0" marL="0">
-              <a:buNone/>
-            </a:pPr>
-            <a:r>
-              <a:rPr lang="en-US" sz="1280" b="1" dirty="0">
+          <p:cNvPr id="64" name="Shape 64"/>
+          <p:cNvSpPr/>
+          <p:nvPr/>
+        </p:nvSpPr>
+        <p:spPr>
+          <a:xfrm>
+            <a:off x="1408176" y="3094329"/>
+            <a:ext cx="3794760" cy="373075"/>
+          </a:xfrm>
+          <a:prstGeom prst="rect">
+            <a:avLst/>
+          </a:prstGeom>
+          <a:noFill/>
+          <a:ln/>
+        </p:spPr>
+        <p:txBody>
+          <a:bodyPr wrap="square" lIns="0" tIns="0" rIns="0" bIns="0" rtlCol="0" anchor="ctr"/>
+          <a:lstStyle/>
+          <a:p>
+            <a:pPr indent="0" marL="0">
+              <a:buNone/>
+            </a:pPr>
+            <a:r>
+              <a:rPr lang="en-US" sz="1200" b="1" dirty="0">
                 <a:solidFill>
                   <a:srgbClr val="14213D"/>
                 </a:solidFill>
@@ -23546,36 +24839,36 @@
               </a:rPr>
               <a:t>Internal transfer at an off-market price</a:t>
             </a:r>
-            <a:endParaRPr lang="en-US" sz="1280" dirty="0"/>
-          </a:p>
-        </p:txBody>
-      </p:sp>
-      <p:sp>
-        <p:nvSpPr>
-          <p:cNvPr id="25" name="Text 23"/>
-          <p:cNvSpPr/>
-          <p:nvPr/>
-        </p:nvSpPr>
-        <p:spPr>
-          <a:xfrm>
-            <a:off x="5276088" y="3456432"/>
-            <a:ext cx="4892040" cy="493776"/>
-          </a:xfrm>
-          <a:prstGeom prst="rect">
-            <a:avLst/>
-          </a:prstGeom>
-          <a:noFill/>
-          <a:ln/>
-        </p:spPr>
-        <p:txBody>
-          <a:bodyPr wrap="square" lIns="0" tIns="0" rIns="0" bIns="0" rtlCol="0" anchor="ctr"/>
-          <a:lstStyle/>
-          <a:p>
-            <a:pPr indent="0" marL="0">
-              <a:buNone/>
-            </a:pPr>
-            <a:r>
-              <a:rPr lang="en-US" sz="1080" dirty="0">
+            <a:endParaRPr lang="en-US" sz="1200" dirty="0"/>
+          </a:p>
+        </p:txBody>
+      </p:sp>
+      <p:sp>
+        <p:nvSpPr>
+          <p:cNvPr id="65" name="Shape 65"/>
+          <p:cNvSpPr/>
+          <p:nvPr/>
+        </p:nvSpPr>
+        <p:spPr>
+          <a:xfrm>
+            <a:off x="5276088" y="3094329"/>
+            <a:ext cx="4892040" cy="373075"/>
+          </a:xfrm>
+          <a:prstGeom prst="rect">
+            <a:avLst/>
+          </a:prstGeom>
+          <a:noFill/>
+          <a:ln/>
+        </p:spPr>
+        <p:txBody>
+          <a:bodyPr wrap="square" lIns="0" tIns="0" rIns="0" bIns="0" rtlCol="0" anchor="ctr"/>
+          <a:lstStyle/>
+          <a:p>
+            <a:pPr indent="0" marL="0">
+              <a:buNone/>
+            </a:pPr>
+            <a:r>
+              <a:rPr lang="en-US" sz="1000" dirty="0">
                 <a:solidFill>
                   <a:srgbClr val="1B2430"/>
                 </a:solidFill>
@@ -23583,22 +24876,22 @@
                 <a:ea typeface="Calibri" pitchFamily="34" charset="-122"/>
                 <a:cs typeface="Calibri" pitchFamily="34" charset="-120"/>
               </a:rPr>
-              <a:t>internal counterparty AND |px − mid| &gt; 60% of the instrument's external materiality threshold AND P&amp;L effect &gt; $150k</a:t>
-            </a:r>
-            <a:endParaRPr lang="en-US" sz="1080" dirty="0"/>
-          </a:p>
-        </p:txBody>
-      </p:sp>
-      <p:sp>
-        <p:nvSpPr>
-          <p:cNvPr id="26" name="Text 24"/>
-          <p:cNvSpPr/>
-          <p:nvPr/>
-        </p:nvSpPr>
-        <p:spPr>
-          <a:xfrm>
-            <a:off x="10259568" y="3456432"/>
-            <a:ext cx="1280160" cy="493776"/>
+              <a:t>internal counterparty AND |px − mid| &gt; 60% of the instrument's external materiality threshold…</a:t>
+            </a:r>
+            <a:endParaRPr lang="en-US" sz="1000" dirty="0"/>
+          </a:p>
+        </p:txBody>
+      </p:sp>
+      <p:sp>
+        <p:nvSpPr>
+          <p:cNvPr id="66" name="Shape 66"/>
+          <p:cNvSpPr/>
+          <p:nvPr/>
+        </p:nvSpPr>
+        <p:spPr>
+          <a:xfrm>
+            <a:off x="10259568" y="3094329"/>
+            <a:ext cx="1280160" cy="373075"/>
           </a:xfrm>
           <a:prstGeom prst="rect">
             <a:avLst/>
@@ -23614,7 +24907,7 @@
               <a:buNone/>
             </a:pPr>
             <a:r>
-              <a:rPr lang="en-US" sz="1020" i="1" dirty="0">
+              <a:rPr lang="en-US" sz="940" i="1" dirty="0">
                 <a:solidFill>
                   <a:srgbClr val="8A94A6"/>
                 </a:solidFill>
@@ -23624,20 +24917,20 @@
               </a:rPr>
               <a:t>The instrument's own spread…</a:t>
             </a:r>
-            <a:endParaRPr lang="en-US" sz="1020" dirty="0"/>
-          </a:p>
-        </p:txBody>
-      </p:sp>
-      <p:sp>
-        <p:nvSpPr>
-          <p:cNvPr id="27" name="Shape 25"/>
-          <p:cNvSpPr/>
-          <p:nvPr/>
-        </p:nvSpPr>
-        <p:spPr>
-          <a:xfrm>
-            <a:off x="566928" y="4005072"/>
-            <a:ext cx="10881360" cy="530352"/>
+            <a:endParaRPr lang="en-US" sz="940" dirty="0"/>
+          </a:p>
+        </p:txBody>
+      </p:sp>
+      <p:sp>
+        <p:nvSpPr>
+          <p:cNvPr id="67" name="Shape 67"/>
+          <p:cNvSpPr/>
+          <p:nvPr/>
+        </p:nvSpPr>
+        <p:spPr>
+          <a:xfrm>
+            <a:off x="566928" y="3522268"/>
+            <a:ext cx="10881360" cy="409651"/>
           </a:xfrm>
           <a:prstGeom prst="rect">
             <a:avLst/>
@@ -23655,13 +24948,13 @@
       </p:sp>
       <p:sp>
         <p:nvSpPr>
-          <p:cNvPr id="28" name="Shape 26"/>
-          <p:cNvSpPr/>
-          <p:nvPr/>
-        </p:nvSpPr>
-        <p:spPr>
-          <a:xfrm>
-            <a:off x="676656" y="4160520"/>
+          <p:cNvPr id="68" name="Shape 68"/>
+          <p:cNvSpPr/>
+          <p:nvPr/>
+        </p:nvSpPr>
+        <p:spPr>
+          <a:xfrm>
+            <a:off x="676656" y="3617365"/>
             <a:ext cx="603504" cy="214884"/>
           </a:xfrm>
           <a:prstGeom prst="roundRect">
@@ -23682,13 +24975,13 @@
       </p:sp>
       <p:sp>
         <p:nvSpPr>
-          <p:cNvPr id="29" name="Text 27"/>
-          <p:cNvSpPr/>
-          <p:nvPr/>
-        </p:nvSpPr>
-        <p:spPr>
-          <a:xfrm>
-            <a:off x="676656" y="4160520"/>
+          <p:cNvPr id="69" name="Shape 69"/>
+          <p:cNvSpPr/>
+          <p:nvPr/>
+        </p:nvSpPr>
+        <p:spPr>
+          <a:xfrm>
+            <a:off x="676656" y="3617365"/>
             <a:ext cx="603504" cy="214884"/>
           </a:xfrm>
           <a:prstGeom prst="rect">
@@ -23721,30 +25014,30 @@
       </p:sp>
       <p:sp>
         <p:nvSpPr>
-          <p:cNvPr id="30" name="Text 28"/>
-          <p:cNvSpPr/>
-          <p:nvPr/>
-        </p:nvSpPr>
-        <p:spPr>
-          <a:xfrm>
-            <a:off x="1408176" y="4023360"/>
-            <a:ext cx="3794760" cy="493776"/>
-          </a:xfrm>
-          <a:prstGeom prst="rect">
-            <a:avLst/>
-          </a:prstGeom>
-          <a:noFill/>
-          <a:ln/>
-        </p:spPr>
-        <p:txBody>
-          <a:bodyPr wrap="square" lIns="0" tIns="0" rIns="0" bIns="0" rtlCol="0" anchor="ctr"/>
-          <a:lstStyle/>
-          <a:p>
-            <a:pPr indent="0" marL="0">
-              <a:buNone/>
-            </a:pPr>
-            <a:r>
-              <a:rPr lang="en-US" sz="1280" b="1" dirty="0">
+          <p:cNvPr id="70" name="Shape 70"/>
+          <p:cNvSpPr/>
+          <p:nvPr/>
+        </p:nvSpPr>
+        <p:spPr>
+          <a:xfrm>
+            <a:off x="1408176" y="3540556"/>
+            <a:ext cx="3794760" cy="373075"/>
+          </a:xfrm>
+          <a:prstGeom prst="rect">
+            <a:avLst/>
+          </a:prstGeom>
+          <a:noFill/>
+          <a:ln/>
+        </p:spPr>
+        <p:txBody>
+          <a:bodyPr wrap="square" lIns="0" tIns="0" rIns="0" bIns="0" rtlCol="0" anchor="ctr"/>
+          <a:lstStyle/>
+          <a:p>
+            <a:pPr indent="0" marL="0">
+              <a:buNone/>
+            </a:pPr>
+            <a:r>
+              <a:rPr lang="en-US" sz="1200" b="1" dirty="0">
                 <a:solidFill>
                   <a:srgbClr val="14213D"/>
                 </a:solidFill>
@@ -23754,36 +25047,36 @@
               </a:rPr>
               <a:t>Implausibly smooth P&amp;L</a:t>
             </a:r>
-            <a:endParaRPr lang="en-US" sz="1280" dirty="0"/>
-          </a:p>
-        </p:txBody>
-      </p:sp>
-      <p:sp>
-        <p:nvSpPr>
-          <p:cNvPr id="31" name="Text 29"/>
-          <p:cNvSpPr/>
-          <p:nvPr/>
-        </p:nvSpPr>
-        <p:spPr>
-          <a:xfrm>
-            <a:off x="5276088" y="4023360"/>
-            <a:ext cx="4892040" cy="493776"/>
-          </a:xfrm>
-          <a:prstGeom prst="rect">
-            <a:avLst/>
-          </a:prstGeom>
-          <a:noFill/>
-          <a:ln/>
-        </p:spPr>
-        <p:txBody>
-          <a:bodyPr wrap="square" lIns="0" tIns="0" rIns="0" bIns="0" rtlCol="0" anchor="ctr"/>
-          <a:lstStyle/>
-          <a:p>
-            <a:pPr indent="0" marL="0">
-              <a:buNone/>
-            </a:pPr>
-            <a:r>
-              <a:rPr lang="en-US" sz="1080" dirty="0">
+            <a:endParaRPr lang="en-US" sz="1200" dirty="0"/>
+          </a:p>
+        </p:txBody>
+      </p:sp>
+      <p:sp>
+        <p:nvSpPr>
+          <p:cNvPr id="71" name="Shape 71"/>
+          <p:cNvSpPr/>
+          <p:nvPr/>
+        </p:nvSpPr>
+        <p:spPr>
+          <a:xfrm>
+            <a:off x="5276088" y="3540556"/>
+            <a:ext cx="4892040" cy="373075"/>
+          </a:xfrm>
+          <a:prstGeom prst="rect">
+            <a:avLst/>
+          </a:prstGeom>
+          <a:noFill/>
+          <a:ln/>
+        </p:spPr>
+        <p:txBody>
+          <a:bodyPr wrap="square" lIns="0" tIns="0" rIns="0" bIns="0" rtlCol="0" anchor="ctr"/>
+          <a:lstStyle/>
+          <a:p>
+            <a:pPr indent="0" marL="0">
+              <a:buNone/>
+            </a:pPr>
+            <a:r>
+              <a:rPr lang="en-US" sz="1000" dirty="0">
                 <a:solidFill>
                   <a:srgbClr val="1B2430"/>
                 </a:solidFill>
@@ -23793,20 +25086,20 @@
               </a:rPr>
               <a:t>losing days over 40 business days &lt; a third of this trader's own 12-month loss-day rate</a:t>
             </a:r>
-            <a:endParaRPr lang="en-US" sz="1080" dirty="0"/>
-          </a:p>
-        </p:txBody>
-      </p:sp>
-      <p:sp>
-        <p:nvSpPr>
-          <p:cNvPr id="32" name="Text 30"/>
-          <p:cNvSpPr/>
-          <p:nvPr/>
-        </p:nvSpPr>
-        <p:spPr>
-          <a:xfrm>
-            <a:off x="10259568" y="4023360"/>
-            <a:ext cx="1280160" cy="493776"/>
+            <a:endParaRPr lang="en-US" sz="1000" dirty="0"/>
+          </a:p>
+        </p:txBody>
+      </p:sp>
+      <p:sp>
+        <p:nvSpPr>
+          <p:cNvPr id="72" name="Shape 72"/>
+          <p:cNvSpPr/>
+          <p:nvPr/>
+        </p:nvSpPr>
+        <p:spPr>
+          <a:xfrm>
+            <a:off x="10259568" y="3540556"/>
+            <a:ext cx="1280160" cy="373075"/>
           </a:xfrm>
           <a:prstGeom prst="rect">
             <a:avLst/>
@@ -23822,7 +25115,7 @@
               <a:buNone/>
             </a:pPr>
             <a:r>
-              <a:rPr lang="en-US" sz="1020" i="1" dirty="0">
+              <a:rPr lang="en-US" sz="940" i="1" dirty="0">
                 <a:solidFill>
                   <a:srgbClr val="8A94A6"/>
                 </a:solidFill>
@@ -23832,19 +25125,19 @@
               </a:rPr>
               <a:t>The trader's own loss-day…</a:t>
             </a:r>
-            <a:endParaRPr lang="en-US" sz="1020" dirty="0"/>
-          </a:p>
-        </p:txBody>
-      </p:sp>
-      <p:sp>
-        <p:nvSpPr>
-          <p:cNvPr id="33" name="Shape 31"/>
-          <p:cNvSpPr/>
-          <p:nvPr/>
-        </p:nvSpPr>
-        <p:spPr>
-          <a:xfrm>
-            <a:off x="676656" y="4727448"/>
+            <a:endParaRPr lang="en-US" sz="940" dirty="0"/>
+          </a:p>
+        </p:txBody>
+      </p:sp>
+      <p:sp>
+        <p:nvSpPr>
+          <p:cNvPr id="73" name="Shape 73"/>
+          <p:cNvSpPr/>
+          <p:nvPr/>
+        </p:nvSpPr>
+        <p:spPr>
+          <a:xfrm>
+            <a:off x="676656" y="4063592"/>
             <a:ext cx="603504" cy="214884"/>
           </a:xfrm>
           <a:prstGeom prst="roundRect">
@@ -23865,13 +25158,13 @@
       </p:sp>
       <p:sp>
         <p:nvSpPr>
-          <p:cNvPr id="34" name="Text 32"/>
-          <p:cNvSpPr/>
-          <p:nvPr/>
-        </p:nvSpPr>
-        <p:spPr>
-          <a:xfrm>
-            <a:off x="676656" y="4727448"/>
+          <p:cNvPr id="74" name="Shape 74"/>
+          <p:cNvSpPr/>
+          <p:nvPr/>
+        </p:nvSpPr>
+        <p:spPr>
+          <a:xfrm>
+            <a:off x="676656" y="4063592"/>
             <a:ext cx="603504" cy="214884"/>
           </a:xfrm>
           <a:prstGeom prst="rect">
@@ -23904,30 +25197,30 @@
       </p:sp>
       <p:sp>
         <p:nvSpPr>
-          <p:cNvPr id="35" name="Text 33"/>
-          <p:cNvSpPr/>
-          <p:nvPr/>
-        </p:nvSpPr>
-        <p:spPr>
-          <a:xfrm>
-            <a:off x="1408176" y="4590288"/>
-            <a:ext cx="3794760" cy="493776"/>
-          </a:xfrm>
-          <a:prstGeom prst="rect">
-            <a:avLst/>
-          </a:prstGeom>
-          <a:noFill/>
-          <a:ln/>
-        </p:spPr>
-        <p:txBody>
-          <a:bodyPr wrap="square" lIns="0" tIns="0" rIns="0" bIns="0" rtlCol="0" anchor="ctr"/>
-          <a:lstStyle/>
-          <a:p>
-            <a:pPr indent="0" marL="0">
-              <a:buNone/>
-            </a:pPr>
-            <a:r>
-              <a:rPr lang="en-US" sz="1280" b="1" dirty="0">
+          <p:cNvPr id="75" name="Shape 75"/>
+          <p:cNvSpPr/>
+          <p:nvPr/>
+        </p:nvSpPr>
+        <p:spPr>
+          <a:xfrm>
+            <a:off x="1408176" y="3986783"/>
+            <a:ext cx="3794760" cy="373075"/>
+          </a:xfrm>
+          <a:prstGeom prst="rect">
+            <a:avLst/>
+          </a:prstGeom>
+          <a:noFill/>
+          <a:ln/>
+        </p:spPr>
+        <p:txBody>
+          <a:bodyPr wrap="square" lIns="0" tIns="0" rIns="0" bIns="0" rtlCol="0" anchor="ctr"/>
+          <a:lstStyle/>
+          <a:p>
+            <a:pPr indent="0" marL="0">
+              <a:buNone/>
+            </a:pPr>
+            <a:r>
+              <a:rPr lang="en-US" sz="1200" b="1" dirty="0">
                 <a:solidFill>
                   <a:srgbClr val="14213D"/>
                 </a:solidFill>
@@ -23937,36 +25230,36 @@
               </a:rPr>
               <a:t>Day-one P&amp;L beyond model tolerance</a:t>
             </a:r>
-            <a:endParaRPr lang="en-US" sz="1280" dirty="0"/>
-          </a:p>
-        </p:txBody>
-      </p:sp>
-      <p:sp>
-        <p:nvSpPr>
-          <p:cNvPr id="36" name="Text 34"/>
-          <p:cNvSpPr/>
-          <p:nvPr/>
-        </p:nvSpPr>
-        <p:spPr>
-          <a:xfrm>
-            <a:off x="5276088" y="4590288"/>
-            <a:ext cx="4892040" cy="493776"/>
-          </a:xfrm>
-          <a:prstGeom prst="rect">
-            <a:avLst/>
-          </a:prstGeom>
-          <a:noFill/>
-          <a:ln/>
-        </p:spPr>
-        <p:txBody>
-          <a:bodyPr wrap="square" lIns="0" tIns="0" rIns="0" bIns="0" rtlCol="0" anchor="ctr"/>
-          <a:lstStyle/>
-          <a:p>
-            <a:pPr indent="0" marL="0">
-              <a:buNone/>
-            </a:pPr>
-            <a:r>
-              <a:rPr lang="en-US" sz="1080" dirty="0">
+            <a:endParaRPr lang="en-US" sz="1200" dirty="0"/>
+          </a:p>
+        </p:txBody>
+      </p:sp>
+      <p:sp>
+        <p:nvSpPr>
+          <p:cNvPr id="76" name="Shape 76"/>
+          <p:cNvSpPr/>
+          <p:nvPr/>
+        </p:nvSpPr>
+        <p:spPr>
+          <a:xfrm>
+            <a:off x="5276088" y="3986783"/>
+            <a:ext cx="4892040" cy="373075"/>
+          </a:xfrm>
+          <a:prstGeom prst="rect">
+            <a:avLst/>
+          </a:prstGeom>
+          <a:noFill/>
+          <a:ln/>
+        </p:spPr>
+        <p:txBody>
+          <a:bodyPr wrap="square" lIns="0" tIns="0" rIns="0" bIns="0" rtlCol="0" anchor="ctr"/>
+          <a:lstStyle/>
+          <a:p>
+            <a:pPr indent="0" marL="0">
+              <a:buNone/>
+            </a:pPr>
+            <a:r>
+              <a:rPr lang="en-US" sz="1000" dirty="0">
                 <a:solidFill>
                   <a:srgbClr val="1B2430"/>
                 </a:solidFill>
@@ -23974,22 +25267,22 @@
                 <a:ea typeface="Calibri" pitchFamily="34" charset="-122"/>
                 <a:cs typeface="Calibri" pitchFamily="34" charset="-120"/>
               </a:rPr>
-              <a:t>day-one P&amp;L beyond the model-validation tolerance for that structure, measured against premium or fee — never…</a:t>
-            </a:r>
-            <a:endParaRPr lang="en-US" sz="1080" dirty="0"/>
-          </a:p>
-        </p:txBody>
-      </p:sp>
-      <p:sp>
-        <p:nvSpPr>
-          <p:cNvPr id="37" name="Text 35"/>
-          <p:cNvSpPr/>
-          <p:nvPr/>
-        </p:nvSpPr>
-        <p:spPr>
-          <a:xfrm>
-            <a:off x="10259568" y="4590288"/>
-            <a:ext cx="1280160" cy="493776"/>
+              <a:t>day-one P&amp;L beyond the model-validation tolerance for that structure, measured against premium…</a:t>
+            </a:r>
+            <a:endParaRPr lang="en-US" sz="1000" dirty="0"/>
+          </a:p>
+        </p:txBody>
+      </p:sp>
+      <p:sp>
+        <p:nvSpPr>
+          <p:cNvPr id="77" name="Shape 77"/>
+          <p:cNvSpPr/>
+          <p:nvPr/>
+        </p:nvSpPr>
+        <p:spPr>
+          <a:xfrm>
+            <a:off x="10259568" y="3986783"/>
+            <a:ext cx="1280160" cy="373075"/>
           </a:xfrm>
           <a:prstGeom prst="rect">
             <a:avLst/>
@@ -24005,7 +25298,7 @@
               <a:buNone/>
             </a:pPr>
             <a:r>
-              <a:rPr lang="en-US" sz="1020" i="1" dirty="0">
+              <a:rPr lang="en-US" sz="940" i="1" dirty="0">
                 <a:solidFill>
                   <a:srgbClr val="8A94A6"/>
                 </a:solidFill>
@@ -24015,20 +25308,20 @@
               </a:rPr>
               <a:t>The day-one tolerance for that…</a:t>
             </a:r>
-            <a:endParaRPr lang="en-US" sz="1020" dirty="0"/>
-          </a:p>
-        </p:txBody>
-      </p:sp>
-      <p:sp>
-        <p:nvSpPr>
-          <p:cNvPr id="38" name="Shape 36"/>
-          <p:cNvSpPr/>
-          <p:nvPr/>
-        </p:nvSpPr>
-        <p:spPr>
-          <a:xfrm>
-            <a:off x="566928" y="5138928"/>
-            <a:ext cx="10881360" cy="530352"/>
+            <a:endParaRPr lang="en-US" sz="940" dirty="0"/>
+          </a:p>
+        </p:txBody>
+      </p:sp>
+      <p:sp>
+        <p:nvSpPr>
+          <p:cNvPr id="78" name="Shape 78"/>
+          <p:cNvSpPr/>
+          <p:nvPr/>
+        </p:nvSpPr>
+        <p:spPr>
+          <a:xfrm>
+            <a:off x="566928" y="4414722"/>
+            <a:ext cx="10881360" cy="409651"/>
           </a:xfrm>
           <a:prstGeom prst="rect">
             <a:avLst/>
@@ -24046,13 +25339,13 @@
       </p:sp>
       <p:sp>
         <p:nvSpPr>
-          <p:cNvPr id="39" name="Shape 37"/>
-          <p:cNvSpPr/>
-          <p:nvPr/>
-        </p:nvSpPr>
-        <p:spPr>
-          <a:xfrm>
-            <a:off x="676656" y="5294376"/>
+          <p:cNvPr id="79" name="Shape 79"/>
+          <p:cNvSpPr/>
+          <p:nvPr/>
+        </p:nvSpPr>
+        <p:spPr>
+          <a:xfrm>
+            <a:off x="676656" y="4509819"/>
             <a:ext cx="603504" cy="214884"/>
           </a:xfrm>
           <a:prstGeom prst="roundRect">
@@ -24065,7 +25358,7 @@
           </a:solidFill>
           <a:ln w="12700">
             <a:solidFill>
-              <a:srgbClr val="C1121F"/>
+              <a:srgbClr val="E09F3E"/>
             </a:solidFill>
             <a:prstDash val="solid"/>
           </a:ln>
@@ -24073,13 +25366,13 @@
       </p:sp>
       <p:sp>
         <p:nvSpPr>
-          <p:cNvPr id="40" name="Text 38"/>
-          <p:cNvSpPr/>
-          <p:nvPr/>
-        </p:nvSpPr>
-        <p:spPr>
-          <a:xfrm>
-            <a:off x="676656" y="5294376"/>
+          <p:cNvPr id="80" name="Shape 80"/>
+          <p:cNvSpPr/>
+          <p:nvPr/>
+        </p:nvSpPr>
+        <p:spPr>
+          <a:xfrm>
+            <a:off x="676656" y="4509819"/>
             <a:ext cx="603504" cy="214884"/>
           </a:xfrm>
           <a:prstGeom prst="rect">
@@ -24112,30 +25405,30 @@
       </p:sp>
       <p:sp>
         <p:nvSpPr>
-          <p:cNvPr id="41" name="Text 39"/>
-          <p:cNvSpPr/>
-          <p:nvPr/>
-        </p:nvSpPr>
-        <p:spPr>
-          <a:xfrm>
-            <a:off x="1408176" y="5157216"/>
-            <a:ext cx="3794760" cy="493776"/>
-          </a:xfrm>
-          <a:prstGeom prst="rect">
-            <a:avLst/>
-          </a:prstGeom>
-          <a:noFill/>
-          <a:ln/>
-        </p:spPr>
-        <p:txBody>
-          <a:bodyPr wrap="square" lIns="0" tIns="0" rIns="0" bIns="0" rtlCol="0" anchor="ctr"/>
-          <a:lstStyle/>
-          <a:p>
-            <a:pPr indent="0" marL="0">
-              <a:buNone/>
-            </a:pPr>
-            <a:r>
-              <a:rPr lang="en-US" sz="1280" b="1" dirty="0">
+          <p:cNvPr id="81" name="Shape 81"/>
+          <p:cNvSpPr/>
+          <p:nvPr/>
+        </p:nvSpPr>
+        <p:spPr>
+          <a:xfrm>
+            <a:off x="1408176" y="4433010"/>
+            <a:ext cx="3794760" cy="373075"/>
+          </a:xfrm>
+          <a:prstGeom prst="rect">
+            <a:avLst/>
+          </a:prstGeom>
+          <a:noFill/>
+          <a:ln/>
+        </p:spPr>
+        <p:txBody>
+          <a:bodyPr wrap="square" lIns="0" tIns="0" rIns="0" bIns="0" rtlCol="0" anchor="ctr"/>
+          <a:lstStyle/>
+          <a:p>
+            <a:pPr indent="0" marL="0">
+              <a:buNone/>
+            </a:pPr>
+            <a:r>
+              <a:rPr lang="en-US" sz="1200" b="1" dirty="0">
                 <a:solidFill>
                   <a:srgbClr val="14213D"/>
                 </a:solidFill>
@@ -24145,36 +25438,36 @@
               </a:rPr>
               <a:t>Give-back after a valuation date</a:t>
             </a:r>
-            <a:endParaRPr lang="en-US" sz="1280" dirty="0"/>
-          </a:p>
-        </p:txBody>
-      </p:sp>
-      <p:sp>
-        <p:nvSpPr>
-          <p:cNvPr id="42" name="Text 40"/>
-          <p:cNvSpPr/>
-          <p:nvPr/>
-        </p:nvSpPr>
-        <p:spPr>
-          <a:xfrm>
-            <a:off x="5276088" y="5157216"/>
-            <a:ext cx="4892040" cy="493776"/>
-          </a:xfrm>
-          <a:prstGeom prst="rect">
-            <a:avLst/>
-          </a:prstGeom>
-          <a:noFill/>
-          <a:ln/>
-        </p:spPr>
-        <p:txBody>
-          <a:bodyPr wrap="square" lIns="0" tIns="0" rIns="0" bIns="0" rtlCol="0" anchor="ctr"/>
-          <a:lstStyle/>
-          <a:p>
-            <a:pPr indent="0" marL="0">
-              <a:buNone/>
-            </a:pPr>
-            <a:r>
-              <a:rPr lang="en-US" sz="1080" dirty="0">
+            <a:endParaRPr lang="en-US" sz="1200" dirty="0"/>
+          </a:p>
+        </p:txBody>
+      </p:sp>
+      <p:sp>
+        <p:nvSpPr>
+          <p:cNvPr id="82" name="Shape 82"/>
+          <p:cNvSpPr/>
+          <p:nvPr/>
+        </p:nvSpPr>
+        <p:spPr>
+          <a:xfrm>
+            <a:off x="5276088" y="4433010"/>
+            <a:ext cx="4892040" cy="373075"/>
+          </a:xfrm>
+          <a:prstGeom prst="rect">
+            <a:avLst/>
+          </a:prstGeom>
+          <a:noFill/>
+          <a:ln/>
+        </p:spPr>
+        <p:txBody>
+          <a:bodyPr wrap="square" lIns="0" tIns="0" rIns="0" bIns="0" rtlCol="0" anchor="ctr"/>
+          <a:lstStyle/>
+          <a:p>
+            <a:pPr indent="0" marL="0">
+              <a:buNone/>
+            </a:pPr>
+            <a:r>
+              <a:rPr lang="en-US" sz="1000" dirty="0">
                 <a:solidFill>
                   <a:srgbClr val="1B2430"/>
                 </a:solidFill>
@@ -24184,20 +25477,20 @@
               </a:rPr>
               <a:t>losses in the 3 business days after month end &gt; 70% of the same trader's reported month-end gain</a:t>
             </a:r>
-            <a:endParaRPr lang="en-US" sz="1080" dirty="0"/>
-          </a:p>
-        </p:txBody>
-      </p:sp>
-      <p:sp>
-        <p:nvSpPr>
-          <p:cNvPr id="43" name="Text 41"/>
-          <p:cNvSpPr/>
-          <p:nvPr/>
-        </p:nvSpPr>
-        <p:spPr>
-          <a:xfrm>
-            <a:off x="10259568" y="5157216"/>
-            <a:ext cx="1280160" cy="493776"/>
+            <a:endParaRPr lang="en-US" sz="1000" dirty="0"/>
+          </a:p>
+        </p:txBody>
+      </p:sp>
+      <p:sp>
+        <p:nvSpPr>
+          <p:cNvPr id="83" name="Shape 83"/>
+          <p:cNvSpPr/>
+          <p:nvPr/>
+        </p:nvSpPr>
+        <p:spPr>
+          <a:xfrm>
+            <a:off x="10259568" y="4433010"/>
+            <a:ext cx="1280160" cy="373075"/>
           </a:xfrm>
           <a:prstGeom prst="rect">
             <a:avLst/>
@@ -24213,7 +25506,7 @@
               <a:buNone/>
             </a:pPr>
             <a:r>
-              <a:rPr lang="en-US" sz="1020" i="1" dirty="0">
+              <a:rPr lang="en-US" sz="940" i="1" dirty="0">
                 <a:solidFill>
                   <a:srgbClr val="8A94A6"/>
                 </a:solidFill>
@@ -24223,7 +25516,581 @@
               </a:rPr>
               <a:t>The trader's own month-end P&amp;L</a:t>
             </a:r>
-            <a:endParaRPr lang="en-US" sz="1020" dirty="0"/>
+            <a:endParaRPr lang="en-US" sz="940" dirty="0"/>
+          </a:p>
+        </p:txBody>
+      </p:sp>
+      <p:sp>
+        <p:nvSpPr>
+          <p:cNvPr id="84" name="Shape 84"/>
+          <p:cNvSpPr/>
+          <p:nvPr/>
+        </p:nvSpPr>
+        <p:spPr>
+          <a:xfrm>
+            <a:off x="676656" y="4956046"/>
+            <a:ext cx="603504" cy="214884"/>
+          </a:xfrm>
+          <a:prstGeom prst="roundRect">
+            <a:avLst>
+              <a:gd name="adj" fmla="val 25532"/>
+            </a:avLst>
+          </a:prstGeom>
+          <a:solidFill>
+            <a:srgbClr val="E09F3E"/>
+          </a:solidFill>
+          <a:ln w="12700">
+            <a:solidFill>
+              <a:srgbClr val="E09F3E"/>
+            </a:solidFill>
+            <a:prstDash val="solid"/>
+          </a:ln>
+        </p:spPr>
+      </p:sp>
+      <p:sp>
+        <p:nvSpPr>
+          <p:cNvPr id="85" name="Shape 85"/>
+          <p:cNvSpPr/>
+          <p:nvPr/>
+        </p:nvSpPr>
+        <p:spPr>
+          <a:xfrm>
+            <a:off x="676656" y="4956046"/>
+            <a:ext cx="603504" cy="214884"/>
+          </a:xfrm>
+          <a:prstGeom prst="rect">
+            <a:avLst/>
+          </a:prstGeom>
+          <a:noFill/>
+          <a:ln/>
+        </p:spPr>
+        <p:txBody>
+          <a:bodyPr wrap="square" lIns="0" tIns="0" rIns="0" bIns="0" rtlCol="0" anchor="ctr"/>
+          <a:lstStyle/>
+          <a:p>
+            <a:pPr algn="ctr" indent="0" marL="0">
+              <a:buNone/>
+            </a:pPr>
+            <a:r>
+              <a:rPr lang="en-US" sz="950" b="1" dirty="0">
+                <a:solidFill>
+                  <a:srgbClr val="FFFFFF"/>
+                </a:solidFill>
+                <a:latin typeface="Courier New" pitchFamily="34" charset="0"/>
+                <a:ea typeface="Courier New" pitchFamily="34" charset="-122"/>
+                <a:cs typeface="Courier New" pitchFamily="34" charset="-120"/>
+              </a:rPr>
+              <a:t>TS-54</a:t>
+            </a:r>
+            <a:endParaRPr lang="en-US" sz="950" dirty="0"/>
+          </a:p>
+        </p:txBody>
+      </p:sp>
+      <p:sp>
+        <p:nvSpPr>
+          <p:cNvPr id="86" name="Shape 86"/>
+          <p:cNvSpPr/>
+          <p:nvPr/>
+        </p:nvSpPr>
+        <p:spPr>
+          <a:xfrm>
+            <a:off x="1408176" y="4879237"/>
+            <a:ext cx="3794760" cy="373075"/>
+          </a:xfrm>
+          <a:prstGeom prst="rect">
+            <a:avLst/>
+          </a:prstGeom>
+          <a:noFill/>
+          <a:ln/>
+        </p:spPr>
+        <p:txBody>
+          <a:bodyPr wrap="square" lIns="0" tIns="0" rIns="0" bIns="0" rtlCol="0" anchor="ctr"/>
+          <a:lstStyle/>
+          <a:p>
+            <a:pPr indent="0" marL="0">
+              <a:buNone/>
+            </a:pPr>
+            <a:r>
+              <a:rPr lang="en-US" sz="1200" b="1" dirty="0">
+                <a:solidFill>
+                  <a:srgbClr val="14213D"/>
+                </a:solidFill>
+                <a:latin typeface="Calibri" pitchFamily="34" charset="0"/>
+                <a:ea typeface="Calibri" pitchFamily="34" charset="-122"/>
+                <a:cs typeface="Calibri" pitchFamily="34" charset="-120"/>
+              </a:rPr>
+              <a:t>Margin outlier against the peer cohort</a:t>
+            </a:r>
+            <a:endParaRPr lang="en-US" sz="1200" dirty="0"/>
+          </a:p>
+        </p:txBody>
+      </p:sp>
+      <p:sp>
+        <p:nvSpPr>
+          <p:cNvPr id="87" name="Shape 87"/>
+          <p:cNvSpPr/>
+          <p:nvPr/>
+        </p:nvSpPr>
+        <p:spPr>
+          <a:xfrm>
+            <a:off x="5276088" y="4879237"/>
+            <a:ext cx="4892040" cy="373075"/>
+          </a:xfrm>
+          <a:prstGeom prst="rect">
+            <a:avLst/>
+          </a:prstGeom>
+          <a:noFill/>
+          <a:ln/>
+        </p:spPr>
+        <p:txBody>
+          <a:bodyPr wrap="square" lIns="0" tIns="0" rIns="0" bIns="0" rtlCol="0" anchor="ctr"/>
+          <a:lstStyle/>
+          <a:p>
+            <a:pPr indent="0" marL="0">
+              <a:buNone/>
+            </a:pPr>
+            <a:r>
+              <a:rPr lang="en-US" sz="1000" dirty="0">
+                <a:solidFill>
+                  <a:srgbClr val="1B2430"/>
+                </a:solidFill>
+                <a:latin typeface="Calibri" pitchFamily="34" charset="0"/>
+                <a:ea typeface="Calibri" pitchFamily="34" charset="-122"/>
+                <a:cs typeface="Calibri" pitchFamily="34" charset="-120"/>
+              </a:rPr>
+              <a:t>this trader's revenue per $1m over 20 business days &gt; 2.5× what their peer cohort earns on the…</a:t>
+            </a:r>
+            <a:endParaRPr lang="en-US" sz="1000" dirty="0"/>
+          </a:p>
+        </p:txBody>
+      </p:sp>
+      <p:sp>
+        <p:nvSpPr>
+          <p:cNvPr id="88" name="Shape 88"/>
+          <p:cNvSpPr/>
+          <p:nvPr/>
+        </p:nvSpPr>
+        <p:spPr>
+          <a:xfrm>
+            <a:off x="10259568" y="4879237"/>
+            <a:ext cx="1280160" cy="373075"/>
+          </a:xfrm>
+          <a:prstGeom prst="rect">
+            <a:avLst/>
+          </a:prstGeom>
+          <a:noFill/>
+          <a:ln/>
+        </p:spPr>
+        <p:txBody>
+          <a:bodyPr wrap="square" lIns="0" tIns="0" rIns="0" bIns="0" rtlCol="0" anchor="ctr"/>
+          <a:lstStyle/>
+          <a:p>
+            <a:pPr algn="r" indent="0" marL="0">
+              <a:buNone/>
+            </a:pPr>
+            <a:r>
+              <a:rPr lang="en-US" sz="940" i="1" dirty="0">
+                <a:solidFill>
+                  <a:srgbClr val="8A94A6"/>
+                </a:solidFill>
+                <a:latin typeface="Calibri" pitchFamily="34" charset="0"/>
+                <a:ea typeface="Calibri" pitchFamily="34" charset="-122"/>
+                <a:cs typeface="Calibri" pitchFamily="34" charset="-120"/>
+              </a:rPr>
+              <a:t>The peer cohort's margin…</a:t>
+            </a:r>
+            <a:endParaRPr lang="en-US" sz="940" dirty="0"/>
+          </a:p>
+        </p:txBody>
+      </p:sp>
+      <p:sp>
+        <p:nvSpPr>
+          <p:cNvPr id="89" name="Shape 89"/>
+          <p:cNvSpPr/>
+          <p:nvPr/>
+        </p:nvSpPr>
+        <p:spPr>
+          <a:xfrm>
+            <a:off x="566928" y="5307176"/>
+            <a:ext cx="10881360" cy="409651"/>
+          </a:xfrm>
+          <a:prstGeom prst="rect">
+            <a:avLst/>
+          </a:prstGeom>
+          <a:solidFill>
+            <a:srgbClr val="F6F8FB"/>
+          </a:solidFill>
+          <a:ln w="12700">
+            <a:solidFill>
+              <a:srgbClr val="F6F8FB"/>
+            </a:solidFill>
+            <a:prstDash val="solid"/>
+          </a:ln>
+        </p:spPr>
+      </p:sp>
+      <p:sp>
+        <p:nvSpPr>
+          <p:cNvPr id="90" name="Shape 90"/>
+          <p:cNvSpPr/>
+          <p:nvPr/>
+        </p:nvSpPr>
+        <p:spPr>
+          <a:xfrm>
+            <a:off x="676656" y="5402273"/>
+            <a:ext cx="603504" cy="214884"/>
+          </a:xfrm>
+          <a:prstGeom prst="roundRect">
+            <a:avLst>
+              <a:gd name="adj" fmla="val 25532"/>
+            </a:avLst>
+          </a:prstGeom>
+          <a:solidFill>
+            <a:srgbClr val="E09F3E"/>
+          </a:solidFill>
+          <a:ln w="12700">
+            <a:solidFill>
+              <a:srgbClr val="E09F3E"/>
+            </a:solidFill>
+            <a:prstDash val="solid"/>
+          </a:ln>
+        </p:spPr>
+      </p:sp>
+      <p:sp>
+        <p:nvSpPr>
+          <p:cNvPr id="91" name="Shape 91"/>
+          <p:cNvSpPr/>
+          <p:nvPr/>
+        </p:nvSpPr>
+        <p:spPr>
+          <a:xfrm>
+            <a:off x="676656" y="5402273"/>
+            <a:ext cx="603504" cy="214884"/>
+          </a:xfrm>
+          <a:prstGeom prst="rect">
+            <a:avLst/>
+          </a:prstGeom>
+          <a:noFill/>
+          <a:ln/>
+        </p:spPr>
+        <p:txBody>
+          <a:bodyPr wrap="square" lIns="0" tIns="0" rIns="0" bIns="0" rtlCol="0" anchor="ctr"/>
+          <a:lstStyle/>
+          <a:p>
+            <a:pPr algn="ctr" indent="0" marL="0">
+              <a:buNone/>
+            </a:pPr>
+            <a:r>
+              <a:rPr lang="en-US" sz="950" b="1" dirty="0">
+                <a:solidFill>
+                  <a:srgbClr val="FFFFFF"/>
+                </a:solidFill>
+                <a:latin typeface="Courier New" pitchFamily="34" charset="0"/>
+                <a:ea typeface="Courier New" pitchFamily="34" charset="-122"/>
+                <a:cs typeface="Courier New" pitchFamily="34" charset="-120"/>
+              </a:rPr>
+              <a:t>TS-55</a:t>
+            </a:r>
+            <a:endParaRPr lang="en-US" sz="950" dirty="0"/>
+          </a:p>
+        </p:txBody>
+      </p:sp>
+      <p:sp>
+        <p:nvSpPr>
+          <p:cNvPr id="92" name="Shape 92"/>
+          <p:cNvSpPr/>
+          <p:nvPr/>
+        </p:nvSpPr>
+        <p:spPr>
+          <a:xfrm>
+            <a:off x="1408176" y="5325464"/>
+            <a:ext cx="3794760" cy="373075"/>
+          </a:xfrm>
+          <a:prstGeom prst="rect">
+            <a:avLst/>
+          </a:prstGeom>
+          <a:noFill/>
+          <a:ln/>
+        </p:spPr>
+        <p:txBody>
+          <a:bodyPr wrap="square" lIns="0" tIns="0" rIns="0" bIns="0" rtlCol="0" anchor="ctr"/>
+          <a:lstStyle/>
+          <a:p>
+            <a:pPr indent="0" marL="0">
+              <a:buNone/>
+            </a:pPr>
+            <a:r>
+              <a:rPr lang="en-US" sz="1200" b="1" dirty="0">
+                <a:solidFill>
+                  <a:srgbClr val="14213D"/>
+                </a:solidFill>
+                <a:latin typeface="Calibri" pitchFamily="34" charset="0"/>
+                <a:ea typeface="Calibri" pitchFamily="34" charset="-122"/>
+                <a:cs typeface="Calibri" pitchFamily="34" charset="-120"/>
+              </a:rPr>
+              <a:t>Revenue pulled into period end</a:t>
+            </a:r>
+            <a:endParaRPr lang="en-US" sz="1200" dirty="0"/>
+          </a:p>
+        </p:txBody>
+      </p:sp>
+      <p:sp>
+        <p:nvSpPr>
+          <p:cNvPr id="93" name="Shape 93"/>
+          <p:cNvSpPr/>
+          <p:nvPr/>
+        </p:nvSpPr>
+        <p:spPr>
+          <a:xfrm>
+            <a:off x="5276088" y="5325464"/>
+            <a:ext cx="4892040" cy="373075"/>
+          </a:xfrm>
+          <a:prstGeom prst="rect">
+            <a:avLst/>
+          </a:prstGeom>
+          <a:noFill/>
+          <a:ln/>
+        </p:spPr>
+        <p:txBody>
+          <a:bodyPr wrap="square" lIns="0" tIns="0" rIns="0" bIns="0" rtlCol="0" anchor="ctr"/>
+          <a:lstStyle/>
+          <a:p>
+            <a:pPr indent="0" marL="0">
+              <a:buNone/>
+            </a:pPr>
+            <a:r>
+              <a:rPr lang="en-US" sz="1000" dirty="0">
+                <a:solidFill>
+                  <a:srgbClr val="1B2430"/>
+                </a:solidFill>
+                <a:latin typeface="Calibri" pitchFamily="34" charset="0"/>
+                <a:ea typeface="Calibri" pitchFamily="34" charset="-122"/>
+                <a:cs typeface="Calibri" pitchFamily="34" charset="-120"/>
+              </a:rPr>
+              <a:t>share of a month's client revenue booked in its last 2 business days &gt; 2.5× this trader's own…</a:t>
+            </a:r>
+            <a:endParaRPr lang="en-US" sz="1000" dirty="0"/>
+          </a:p>
+        </p:txBody>
+      </p:sp>
+      <p:sp>
+        <p:nvSpPr>
+          <p:cNvPr id="94" name="Shape 94"/>
+          <p:cNvSpPr/>
+          <p:nvPr/>
+        </p:nvSpPr>
+        <p:spPr>
+          <a:xfrm>
+            <a:off x="10259568" y="5325464"/>
+            <a:ext cx="1280160" cy="373075"/>
+          </a:xfrm>
+          <a:prstGeom prst="rect">
+            <a:avLst/>
+          </a:prstGeom>
+          <a:noFill/>
+          <a:ln/>
+        </p:spPr>
+        <p:txBody>
+          <a:bodyPr wrap="square" lIns="0" tIns="0" rIns="0" bIns="0" rtlCol="0" anchor="ctr"/>
+          <a:lstStyle/>
+          <a:p>
+            <a:pPr algn="r" indent="0" marL="0">
+              <a:buNone/>
+            </a:pPr>
+            <a:r>
+              <a:rPr lang="en-US" sz="940" i="1" dirty="0">
+                <a:solidFill>
+                  <a:srgbClr val="8A94A6"/>
+                </a:solidFill>
+                <a:latin typeface="Calibri" pitchFamily="34" charset="0"/>
+                <a:ea typeface="Calibri" pitchFamily="34" charset="-122"/>
+                <a:cs typeface="Calibri" pitchFamily="34" charset="-120"/>
+              </a:rPr>
+              <a:t>The trader's own 12-month share…</a:t>
+            </a:r>
+            <a:endParaRPr lang="en-US" sz="940" dirty="0"/>
+          </a:p>
+        </p:txBody>
+      </p:sp>
+      <p:sp>
+        <p:nvSpPr>
+          <p:cNvPr id="95" name="Shape 95"/>
+          <p:cNvSpPr/>
+          <p:nvPr/>
+        </p:nvSpPr>
+        <p:spPr>
+          <a:xfrm>
+            <a:off x="676656" y="5848500"/>
+            <a:ext cx="603504" cy="214884"/>
+          </a:xfrm>
+          <a:prstGeom prst="roundRect">
+            <a:avLst>
+              <a:gd name="adj" fmla="val 25532"/>
+            </a:avLst>
+          </a:prstGeom>
+          <a:solidFill>
+            <a:srgbClr val="E09F3E"/>
+          </a:solidFill>
+          <a:ln w="12700">
+            <a:solidFill>
+              <a:srgbClr val="E09F3E"/>
+            </a:solidFill>
+            <a:prstDash val="solid"/>
+          </a:ln>
+        </p:spPr>
+      </p:sp>
+      <p:sp>
+        <p:nvSpPr>
+          <p:cNvPr id="96" name="Shape 96"/>
+          <p:cNvSpPr/>
+          <p:nvPr/>
+        </p:nvSpPr>
+        <p:spPr>
+          <a:xfrm>
+            <a:off x="676656" y="5848500"/>
+            <a:ext cx="603504" cy="214884"/>
+          </a:xfrm>
+          <a:prstGeom prst="rect">
+            <a:avLst/>
+          </a:prstGeom>
+          <a:noFill/>
+          <a:ln/>
+        </p:spPr>
+        <p:txBody>
+          <a:bodyPr wrap="square" lIns="0" tIns="0" rIns="0" bIns="0" rtlCol="0" anchor="ctr"/>
+          <a:lstStyle/>
+          <a:p>
+            <a:pPr algn="ctr" indent="0" marL="0">
+              <a:buNone/>
+            </a:pPr>
+            <a:r>
+              <a:rPr lang="en-US" sz="950" b="1" dirty="0">
+                <a:solidFill>
+                  <a:srgbClr val="FFFFFF"/>
+                </a:solidFill>
+                <a:latin typeface="Courier New" pitchFamily="34" charset="0"/>
+                <a:ea typeface="Courier New" pitchFamily="34" charset="-122"/>
+                <a:cs typeface="Courier New" pitchFamily="34" charset="-120"/>
+              </a:rPr>
+              <a:t>TS-57</a:t>
+            </a:r>
+            <a:endParaRPr lang="en-US" sz="950" dirty="0"/>
+          </a:p>
+        </p:txBody>
+      </p:sp>
+      <p:sp>
+        <p:nvSpPr>
+          <p:cNvPr id="97" name="Shape 97"/>
+          <p:cNvSpPr/>
+          <p:nvPr/>
+        </p:nvSpPr>
+        <p:spPr>
+          <a:xfrm>
+            <a:off x="1408176" y="5771691"/>
+            <a:ext cx="3794760" cy="373075"/>
+          </a:xfrm>
+          <a:prstGeom prst="rect">
+            <a:avLst/>
+          </a:prstGeom>
+          <a:noFill/>
+          <a:ln/>
+        </p:spPr>
+        <p:txBody>
+          <a:bodyPr wrap="square" lIns="0" tIns="0" rIns="0" bIns="0" rtlCol="0" anchor="ctr"/>
+          <a:lstStyle/>
+          <a:p>
+            <a:pPr indent="0" marL="0">
+              <a:buNone/>
+            </a:pPr>
+            <a:r>
+              <a:rPr lang="en-US" sz="1200" b="1" dirty="0">
+                <a:solidFill>
+                  <a:srgbClr val="14213D"/>
+                </a:solidFill>
+                <a:latin typeface="Calibri" pitchFamily="34" charset="0"/>
+                <a:ea typeface="Calibri" pitchFamily="34" charset="-122"/>
+                <a:cs typeface="Calibri" pitchFamily="34" charset="-120"/>
+              </a:rPr>
+              <a:t>Front-office and product-control P&amp;L disagree</a:t>
+            </a:r>
+            <a:endParaRPr lang="en-US" sz="1200" dirty="0"/>
+          </a:p>
+        </p:txBody>
+      </p:sp>
+      <p:sp>
+        <p:nvSpPr>
+          <p:cNvPr id="98" name="Shape 98"/>
+          <p:cNvSpPr/>
+          <p:nvPr/>
+        </p:nvSpPr>
+        <p:spPr>
+          <a:xfrm>
+            <a:off x="5276088" y="5771691"/>
+            <a:ext cx="4892040" cy="373075"/>
+          </a:xfrm>
+          <a:prstGeom prst="rect">
+            <a:avLst/>
+          </a:prstGeom>
+          <a:noFill/>
+          <a:ln/>
+        </p:spPr>
+        <p:txBody>
+          <a:bodyPr wrap="square" lIns="0" tIns="0" rIns="0" bIns="0" rtlCol="0" anchor="ctr"/>
+          <a:lstStyle/>
+          <a:p>
+            <a:pPr indent="0" marL="0">
+              <a:buNone/>
+            </a:pPr>
+            <a:r>
+              <a:rPr lang="en-US" sz="1000" dirty="0">
+                <a:solidFill>
+                  <a:srgbClr val="1B2430"/>
+                </a:solidFill>
+                <a:latin typeface="Calibri" pitchFamily="34" charset="0"/>
+                <a:ea typeface="Calibri" pitchFamily="34" charset="-122"/>
+                <a:cs typeface="Calibri" pitchFamily="34" charset="-120"/>
+              </a:rPr>
+              <a:t>|front-office revenue − product-control P&amp;L| for one trader on one day &gt; max($250k, 3× that…</a:t>
+            </a:r>
+            <a:endParaRPr lang="en-US" sz="1000" dirty="0"/>
+          </a:p>
+        </p:txBody>
+      </p:sp>
+      <p:sp>
+        <p:nvSpPr>
+          <p:cNvPr id="99" name="Shape 99"/>
+          <p:cNvSpPr/>
+          <p:nvPr/>
+        </p:nvSpPr>
+        <p:spPr>
+          <a:xfrm>
+            <a:off x="10259568" y="5771691"/>
+            <a:ext cx="1280160" cy="373075"/>
+          </a:xfrm>
+          <a:prstGeom prst="rect">
+            <a:avLst/>
+          </a:prstGeom>
+          <a:noFill/>
+          <a:ln/>
+        </p:spPr>
+        <p:txBody>
+          <a:bodyPr wrap="square" lIns="0" tIns="0" rIns="0" bIns="0" rtlCol="0" anchor="ctr"/>
+          <a:lstStyle/>
+          <a:p>
+            <a:pPr algn="r" indent="0" marL="0">
+              <a:buNone/>
+            </a:pPr>
+            <a:r>
+              <a:rPr lang="en-US" sz="940" i="1" dirty="0">
+                <a:solidFill>
+                  <a:srgbClr val="8A94A6"/>
+                </a:solidFill>
+                <a:latin typeface="Calibri" pitchFamily="34" charset="0"/>
+                <a:ea typeface="Calibri" pitchFamily="34" charset="-122"/>
+                <a:cs typeface="Calibri" pitchFamily="34" charset="-120"/>
+              </a:rPr>
+              <a:t>The trader's own 60-day break…</a:t>
+            </a:r>
+            <a:endParaRPr lang="en-US" sz="940" dirty="0"/>
           </a:p>
         </p:txBody>
       </p:sp>
